--- a/artifacts/speaking-portfolio-expanded/decks/evidence-learning-15min-handout.pptx
+++ b/artifacts/speaking-portfolio-expanded/decks/evidence-learning-15min-handout.pptx
@@ -194,7 +194,7 @@
                 <a:ea typeface="Arial"/>
                 <a:cs typeface="Arial"/>
               </a:rPr>
-              <a:t xml:space="preserve">[Presenter scripts](../packets/evidence-learning/script-40min.md) · [Packet](../packets/evidence-learning/packet.md) · [Walkthrough](../education/demo.md) · [Evidence](../packets/evidence-learning/evidence-bank.md) · [Working notes](../packets/evidence-learning/notes-2026-09-05.md)</a:t>
+              <a:t xml:space="preserve">[Presenter scripts](../packets/evidence-learning/script-40min.md) · [Packet](../packets/evidence-learning/packet.md) · [Walkthrough](../education/demo.md) · [Evidence](../packets/evidence-learning/evidence-bank.md) · [Procurement route](../packets/evidence-learning/procurement-route.md)</a:t>
             </a:r>
             <a:endParaRPr lang="en-US" sz="1200"/>
           </a:p>
@@ -240,7 +240,7 @@
                 <a:ea typeface="Arial"/>
                 <a:cs typeface="Arial"/>
               </a:rPr>
-              <a:t xml:space="preserve">Worked example: $100, up 20%, then down 20%. The Skeptic talk uses a different example so the two can be booked together. The smudged arithmetic sheet is the K-12 example.</a:t>
+              <a:t xml:space="preserve">Worked example: $100, up 20%, then down 20%. The smudged arithmetic sheet is the K-12 example. [Show Me the Misconception](../packets/evidence-learning/procurement-route.md), the 15-minute procurement route, uses the history-essay example instead, so a program can book both without hearing the percentage fixture twice.</a:t>
             </a:r>
             <a:endParaRPr lang="en-US" sz="1200"/>
           </a:p>
@@ -399,53 +399,7 @@
                 <a:ea typeface="Arial"/>
                 <a:cs typeface="Arial"/>
               </a:rPr>
-              <a:t xml:space="preserve">Koedinger and Aleven (2007), [Exploring the Assistance Dilemma in Experiments with Cognitive Tutors](https://doi.org/10.1007/s10648-007-9049-0), Educational Psychology Review 19(3), 239 to 264. Cited on slide 3.</a:t>
-            </a:r>
-            <a:endParaRPr lang="en-US" sz="1200"/>
-          </a:p>
-          <a:p>
-            <a:pPr marL="0" indent="0">
-              <a:lnSpc>
-                <a:spcPts val="1560"/>
-              </a:lnSpc>
-              <a:spcAft>
-                <a:spcPts val="0"/>
-              </a:spcAft>
-              <a:buNone/>
-            </a:pPr>
-            <a:r>
-              <a:rPr lang="en-US" sz="1200" b="0">
-                <a:solidFill>
-                  <a:srgbClr val="202b33"/>
-                </a:solidFill>
-                <a:latin typeface="Arial"/>
-                <a:ea typeface="Arial"/>
-                <a:cs typeface="Arial"/>
-              </a:rPr>
-              <a:t xml:space="preserve"/>
-            </a:r>
-            <a:endParaRPr lang="en-US" sz="1200"/>
-          </a:p>
-          <a:p>
-            <a:pPr marL="0" indent="0">
-              <a:lnSpc>
-                <a:spcPts val="1560"/>
-              </a:lnSpc>
-              <a:spcAft>
-                <a:spcPts val="0"/>
-              </a:spcAft>
-              <a:buNone/>
-            </a:pPr>
-            <a:r>
-              <a:rPr lang="en-US" sz="1200" b="0">
-                <a:solidFill>
-                  <a:srgbClr val="202b33"/>
-                </a:solidFill>
-                <a:latin typeface="Arial"/>
-                <a:ea typeface="Arial"/>
-                <a:cs typeface="Arial"/>
-              </a:rPr>
-              <a:t xml:space="preserve">Bastani et al. (2025), [Generative AI without guardrails can harm learning](https://doi.org/10.1073/pnas.2422633122), PNAS. A [correction](https://doi.org/10.1073/pnas.2518204122) exists; check it before quoting figures.</a:t>
+              <a:t xml:space="preserve">Bastani et al. (2025), [Generative AI without guardrails can harm learning](https://doi.org/10.1073/pnas.2422633122), PNAS. The [correction](https://doi.org/10.1073/pnas.2518204122) (August 2025) fixes an author affiliation; no result changed.</a:t>
             </a:r>
             <a:endParaRPr lang="en-US" sz="1200"/>
           </a:p>
@@ -1842,52 +1796,6 @@
                 <a:ea typeface="Arial"/>
                 <a:cs typeface="Arial"/>
               </a:rPr>
-              <a:t xml:space="preserve">Koedinger and Aleven (2007), [Exploring the Assistance Dilemma in Experiments with Cognitive Tutors](https://doi.org/10.1007/s10648-007-9049-0), Educational Psychology Review 19(3), 239 to 264. Cited on slide 3.</a:t>
-            </a:r>
-            <a:endParaRPr lang="en-US" sz="1200"/>
-          </a:p>
-          <a:p>
-            <a:pPr marL="0" indent="0">
-              <a:lnSpc>
-                <a:spcPts val="1560"/>
-              </a:lnSpc>
-              <a:spcAft>
-                <a:spcPts val="0"/>
-              </a:spcAft>
-              <a:buNone/>
-            </a:pPr>
-            <a:r>
-              <a:rPr lang="en-US" sz="1200" b="0">
-                <a:solidFill>
-                  <a:srgbClr val="202b33"/>
-                </a:solidFill>
-                <a:latin typeface="Arial"/>
-                <a:ea typeface="Arial"/>
-                <a:cs typeface="Arial"/>
-              </a:rPr>
-              <a:t xml:space="preserve"/>
-            </a:r>
-            <a:endParaRPr lang="en-US" sz="1200"/>
-          </a:p>
-          <a:p>
-            <a:pPr marL="0" indent="0">
-              <a:lnSpc>
-                <a:spcPts val="1560"/>
-              </a:lnSpc>
-              <a:spcAft>
-                <a:spcPts val="0"/>
-              </a:spcAft>
-              <a:buNone/>
-            </a:pPr>
-            <a:r>
-              <a:rPr lang="en-US" sz="1200" b="0">
-                <a:solidFill>
-                  <a:srgbClr val="202b33"/>
-                </a:solidFill>
-                <a:latin typeface="Arial"/>
-                <a:ea typeface="Arial"/>
-                <a:cs typeface="Arial"/>
-              </a:rPr>
               <a:t xml:space="preserve"/>
             </a:r>
             <a:endParaRPr lang="en-US" sz="1200"/>
@@ -2620,7 +2528,7 @@
                 <a:ea typeface="Arial"/>
                 <a:cs typeface="Arial"/>
               </a:rPr>
-              <a:t xml:space="preserve">Source slide 7. 06:00 to 09:30</a:t>
+              <a:t xml:space="preserve">Source slide 7. 06:00 to 09:00</a:t>
             </a:r>
             <a:endParaRPr lang="en-US" sz="1200"/>
           </a:p>
@@ -2758,7 +2666,7 @@
                 <a:ea typeface="Arial"/>
                 <a:cs typeface="Arial"/>
               </a:rPr>
-              <a:t xml:space="preserve">Run the two scripted learners from the runbook, then go live. Reveal the wrong argument. Let the room find the base. Reveal $120 only after the diagnostic question. Ask for $96 and one sentence explaining it.</a:t>
+              <a:t xml:space="preserve">Run the scripted tutor turns — from the kit or read off the card — then go live. Reveal the wrong argument. Let the room find the base. Reveal $120 only after the diagnostic question. Ask for $96 and one sentence explaining it.</a:t>
             </a:r>
             <a:endParaRPr lang="en-US" sz="1200"/>
           </a:p>
@@ -2896,7 +2804,7 @@
                 <a:ea typeface="Arial"/>
                 <a:cs typeface="Arial"/>
               </a:rPr>
-              <a:t xml:space="preserve">Runbook section 5 for the scripted turns. Two-minute compression: skip the kit, run only the $100 sequence, state the $80 item.</a:t>
+              <a:t xml:space="preserve">Runbook section 5 has the five scripted turns and the same table in print. If the room is quiet, present the prepared learner response; never pressure an individual into a public assessment. Two-minute compression: skip the kit, run only the $100 sequence, state the $80 item.</a:t>
             </a:r>
             <a:endParaRPr lang="en-US" sz="1200"/>
           </a:p>
@@ -3055,7 +2963,7 @@
                 <a:ea typeface="Arial"/>
                 <a:cs typeface="Arial"/>
               </a:rPr>
-              <a:t xml:space="preserve">Source slide 8. 09:30 to 11:30</a:t>
+              <a:t xml:space="preserve">Source slide 8. 09:00 to 11:00</a:t>
             </a:r>
             <a:endParaRPr lang="en-US" sz="1200"/>
           </a:p>
@@ -3239,7 +3147,7 @@
                 <a:ea typeface="Arial"/>
                 <a:cs typeface="Arial"/>
               </a:rPr>
-              <a:t xml:space="preserve">Zero: the wrong base persists. One: the right number, no explanation. Two: the learner explains the current amount. Help goes in its own column so a human can read it, and asking a question costs nothing. Try the rubric on sample work before it touches a grade.</a:t>
+              <a:t xml:space="preserve">Zero: the wrong base persists. One: the right number, no explanation. Two: the learner explains the current amount. Help goes in its own column so a human can read it, and asking a question costs nothing.</a:t>
             </a:r>
             <a:endParaRPr lang="en-US" sz="1200"/>
           </a:p>
@@ -3331,7 +3239,7 @@
                 <a:ea typeface="Arial"/>
                 <a:cs typeface="Arial"/>
               </a:rPr>
-              <a:t xml:space="preserve">Bastani et al. (2025), [Generative AI without guardrails can harm learning](https://doi.org/10.1073/pnas.2422633122), PNAS. A [correction](https://doi.org/10.1073/pnas.2518204122) exists; check it before quoting figures.</a:t>
+              <a:t xml:space="preserve">Bastani et al. (2025), [Generative AI without guardrails can harm learning](https://doi.org/10.1073/pnas.2422633122), PNAS. The [correction](https://doi.org/10.1073/pnas.2518204122) (August 2025) fixes an author affiliation; no result changed.</a:t>
             </a:r>
             <a:endParaRPr lang="en-US" sz="1200"/>
           </a:p>
@@ -3628,7 +3536,7 @@
                 <a:ea typeface="Arial"/>
                 <a:cs typeface="Arial"/>
               </a:rPr>
-              <a:t xml:space="preserve">Source slide 9. 11:30 to 13:30</a:t>
+              <a:t xml:space="preserve">Source slide 9. 11:00 to 13:30</a:t>
             </a:r>
             <a:endParaRPr lang="en-US" sz="1200"/>
           </a:p>
@@ -3812,7 +3720,7 @@
                 <a:ea typeface="Arial"/>
                 <a:cs typeface="Arial"/>
               </a:rPr>
-              <a:t xml:space="preserve">Answering from memory and reading a model's output aloud produce different mistakes. The reader falls behind as the text wraps and jumps. They mispronounce a word they'd never have chosen. Spoken language carries enough tells to sort likely from unlikely, never to convict.</a:t>
+              <a:t xml:space="preserve">Answering from memory and reading a model's output aloud produce different mistakes. The reader falls behind as the text wraps and jumps. They mispronounce a word they'd never have chosen. Spoken language carries enough tells to sort likely from unlikely.</a:t>
             </a:r>
             <a:endParaRPr lang="en-US" sz="1200"/>
           </a:p>
@@ -3904,6 +3812,29 @@
                 <a:ea typeface="Arial"/>
                 <a:cs typeface="Arial"/>
               </a:rPr>
+              <a:t xml:space="preserve">Now the care, and it's real. A student's voice identifies them and can be cloned. Fingerprinting voices is plausible technology; that's a reason for caution, not a feature. Newer offline models claim to detect frustration and distress in speech, and offline is what lets them meet zero-retention, no-sharing district rules on modest hardware. Any student-facing voice tool gets maximum privacy, a written alternative, age-appropriate use only, and a retention rule written before the first recording. A replay is context, never proof.</a:t>
+            </a:r>
+            <a:endParaRPr lang="en-US" sz="1200"/>
+          </a:p>
+          <a:p>
+            <a:pPr marL="0" indent="0">
+              <a:lnSpc>
+                <a:spcPts val="1560"/>
+              </a:lnSpc>
+              <a:spcAft>
+                <a:spcPts val="0"/>
+              </a:spcAft>
+              <a:buNone/>
+            </a:pPr>
+            <a:r>
+              <a:rPr lang="en-US" sz="1200" b="0">
+                <a:solidFill>
+                  <a:srgbClr val="202b33"/>
+                </a:solidFill>
+                <a:latin typeface="Arial"/>
+                <a:ea typeface="Arial"/>
+                <a:cs typeface="Arial"/>
+              </a:rPr>
               <a:t xml:space="preserve"/>
             </a:r>
             <a:endParaRPr lang="en-US" sz="1200"/>
@@ -3996,7 +3927,30 @@
                 <a:ea typeface="Arial"/>
                 <a:cs typeface="Arial"/>
               </a:rPr>
-              <a:t xml:space="preserve">Bridge: count AI time like talk time, write the objective on the board to the agent, and redesign one checkpoint; the worksheet is a handout.</a:t>
+              <a:t xml:space="preserve"/>
+            </a:r>
+            <a:endParaRPr lang="en-US" sz="1200"/>
+          </a:p>
+          <a:p>
+            <a:pPr marL="0" indent="0">
+              <a:lnSpc>
+                <a:spcPts val="1560"/>
+              </a:lnSpc>
+              <a:spcAft>
+                <a:spcPts val="0"/>
+              </a:spcAft>
+              <a:buNone/>
+            </a:pPr>
+            <a:r>
+              <a:rPr lang="en-US" sz="1200" b="0">
+                <a:solidFill>
+                  <a:srgbClr val="202b33"/>
+                </a:solidFill>
+                <a:latin typeface="Arial"/>
+                <a:ea typeface="Arial"/>
+                <a:cs typeface="Arial"/>
+              </a:rPr>
+              <a:t xml:space="preserve">Bridge: count AI time like talk time, write the objective on the board to the agent, and redesign one checkpoint; the worksheet is a handout. And one more student: a friend of mine turned out to be a talented sculptor who never touched the clay in class, because there was no car at home and you do not carry a brick of clay on the bus.</a:t>
             </a:r>
             <a:endParaRPr lang="en-US" sz="1200"/>
           </a:p>
@@ -4248,52 +4202,6 @@
                 <a:cs typeface="Arial"/>
               </a:rPr>
               <a:t xml:space="preserve">Stop trying to prove who typed the sentence. Ask whether the student can explain it, challenge it, change it, apply it, and defend it. That means teaching changes: how we put agents in the room, how we model using them, how we design group work around them.</a:t>
-            </a:r>
-            <a:endParaRPr lang="en-US" sz="1200"/>
-          </a:p>
-          <a:p>
-            <a:pPr marL="0" indent="0">
-              <a:lnSpc>
-                <a:spcPts val="1560"/>
-              </a:lnSpc>
-              <a:spcAft>
-                <a:spcPts val="0"/>
-              </a:spcAft>
-              <a:buNone/>
-            </a:pPr>
-            <a:r>
-              <a:rPr lang="en-US" sz="1200" b="0">
-                <a:solidFill>
-                  <a:srgbClr val="202b33"/>
-                </a:solidFill>
-                <a:latin typeface="Arial"/>
-                <a:ea typeface="Arial"/>
-                <a:cs typeface="Arial"/>
-              </a:rPr>
-              <a:t xml:space="preserve"/>
-            </a:r>
-            <a:endParaRPr lang="en-US" sz="1200"/>
-          </a:p>
-          <a:p>
-            <a:pPr marL="0" indent="0">
-              <a:lnSpc>
-                <a:spcPts val="1560"/>
-              </a:lnSpc>
-              <a:spcAft>
-                <a:spcPts val="0"/>
-              </a:spcAft>
-              <a:buNone/>
-            </a:pPr>
-            <a:r>
-              <a:rPr lang="en-US" sz="1200" b="0">
-                <a:solidFill>
-                  <a:srgbClr val="202b33"/>
-                </a:solidFill>
-                <a:latin typeface="Arial"/>
-                <a:ea typeface="Arial"/>
-                <a:cs typeface="Arial"/>
-              </a:rPr>
-              <a:t xml:space="preserve">The kid next to the Casio owner didn't need a watch. The kid with no car never touched the clay. The same tool that lets Johnny phone it in is the one that can hand a sculptor the clay. Which one happens is a design decision, and it's ours.</a:t>
             </a:r>
             <a:endParaRPr lang="en-US" sz="1200"/>
           </a:p>
@@ -5201,145 +5109,76 @@
                 <a:ea typeface="Arial"/>
                 <a:cs typeface="Arial"/>
               </a:rPr>
-              <a:t xml:space="preserve">Koedinger and Aleven (2007), Exploring the</a:t>
-            </a:r>
-            <a:endParaRPr lang="en-US" sz="1500"/>
-          </a:p>
-          <a:p>
-            <a:pPr marL="0" indent="0">
-              <a:lnSpc>
-                <a:spcPts val="1950"/>
-              </a:lnSpc>
-              <a:spcAft>
-                <a:spcPts val="0"/>
-              </a:spcAft>
-              <a:buNone/>
-            </a:pPr>
-            <a:r>
-              <a:rPr lang="en-US" sz="1500" b="0">
-                <a:solidFill>
-                  <a:srgbClr val="202B33"/>
-                </a:solidFill>
-                <a:latin typeface="Arial"/>
-                <a:ea typeface="Arial"/>
-                <a:cs typeface="Arial"/>
-              </a:rPr>
-              <a:t xml:space="preserve">Assistance Dilemma in Experiments with</a:t>
-            </a:r>
-            <a:endParaRPr lang="en-US" sz="1500"/>
-          </a:p>
-          <a:p>
-            <a:pPr marL="0" indent="0">
-              <a:lnSpc>
-                <a:spcPts val="1950"/>
-              </a:lnSpc>
-              <a:spcAft>
-                <a:spcPts val="0"/>
-              </a:spcAft>
-              <a:buNone/>
-            </a:pPr>
-            <a:r>
-              <a:rPr lang="en-US" sz="1500" b="0">
-                <a:solidFill>
-                  <a:srgbClr val="202B33"/>
-                </a:solidFill>
-                <a:latin typeface="Arial"/>
-                <a:ea typeface="Arial"/>
-                <a:cs typeface="Arial"/>
-              </a:rPr>
-              <a:t xml:space="preserve">Cognitive Tutors —</a:t>
-            </a:r>
-            <a:endParaRPr lang="en-US" sz="1500"/>
-          </a:p>
-          <a:p>
-            <a:pPr marL="0" indent="0">
-              <a:lnSpc>
-                <a:spcPts val="1950"/>
-              </a:lnSpc>
-              <a:spcAft>
-                <a:spcPts val="0"/>
-              </a:spcAft>
-              <a:buNone/>
-            </a:pPr>
-            <a:r>
-              <a:rPr lang="en-US" sz="1500" b="0">
-                <a:solidFill>
-                  <a:srgbClr val="202B33"/>
-                </a:solidFill>
-                <a:latin typeface="Arial"/>
-                <a:ea typeface="Arial"/>
-                <a:cs typeface="Arial"/>
-              </a:rPr>
-              <a:t xml:space="preserve">https://doi.org/10.1007/s10648-007-9049-0),</a:t>
-            </a:r>
-            <a:endParaRPr lang="en-US" sz="1500"/>
-          </a:p>
-          <a:p>
-            <a:pPr marL="0" indent="0">
-              <a:lnSpc>
-                <a:spcPts val="1950"/>
-              </a:lnSpc>
-              <a:spcAft>
-                <a:spcPts val="0"/>
-              </a:spcAft>
-              <a:buNone/>
-            </a:pPr>
-            <a:r>
-              <a:rPr lang="en-US" sz="1500" b="0">
-                <a:solidFill>
-                  <a:srgbClr val="202B33"/>
-                </a:solidFill>
-                <a:latin typeface="Arial"/>
-                <a:ea typeface="Arial"/>
-                <a:cs typeface="Arial"/>
-              </a:rPr>
-              <a:t xml:space="preserve">Educational Psychology Review 19(3, 239 to</a:t>
-            </a:r>
-            <a:endParaRPr lang="en-US" sz="1500"/>
-          </a:p>
-          <a:p>
-            <a:pPr marL="0" indent="0">
-              <a:lnSpc>
-                <a:spcPts val="1950"/>
-              </a:lnSpc>
-              <a:spcAft>
-                <a:spcPts val="0"/>
-              </a:spcAft>
-              <a:buNone/>
-            </a:pPr>
-            <a:r>
-              <a:rPr lang="en-US" sz="1500" b="0">
-                <a:solidFill>
-                  <a:srgbClr val="202B33"/>
-                </a:solidFill>
-                <a:latin typeface="Arial"/>
-                <a:ea typeface="Arial"/>
-                <a:cs typeface="Arial"/>
-              </a:rPr>
-              <a:t xml:space="preserve">264. Cited on slide 3.</a:t>
-            </a:r>
-            <a:endParaRPr lang="en-US" sz="1500"/>
-          </a:p>
-          <a:p>
-            <a:pPr marL="0" indent="0">
-              <a:lnSpc>
-                <a:spcPts val="1950"/>
-              </a:lnSpc>
-              <a:spcAft>
-                <a:spcPts val="0"/>
-              </a:spcAft>
-              <a:buNone/>
-            </a:pPr>
-            <a:r>
-              <a:rPr lang="en-US" sz="1500" b="0">
-                <a:solidFill>
-                  <a:srgbClr val="202B33"/>
-                </a:solidFill>
-                <a:latin typeface="Arial"/>
-                <a:ea typeface="Arial"/>
-                <a:cs typeface="Arial"/>
-              </a:rPr>
-              <a:t xml:space="preserve"/>
+              <a:t xml:space="preserve">Bastani et al. (2025), Generative AI</a:t>
+            </a:r>
+            <a:endParaRPr lang="en-US" sz="1500"/>
+          </a:p>
+          <a:p>
+            <a:pPr marL="0" indent="0">
+              <a:lnSpc>
+                <a:spcPts val="1950"/>
+              </a:lnSpc>
+              <a:spcAft>
+                <a:spcPts val="0"/>
+              </a:spcAft>
+              <a:buNone/>
+            </a:pPr>
+            <a:r>
+              <a:rPr lang="en-US" sz="1500" b="0">
+                <a:solidFill>
+                  <a:srgbClr val="202B33"/>
+                </a:solidFill>
+                <a:latin typeface="Arial"/>
+                <a:ea typeface="Arial"/>
+                <a:cs typeface="Arial"/>
+              </a:rPr>
+              <a:t xml:space="preserve">without guardrails can harm learning —</a:t>
+            </a:r>
+            <a:endParaRPr lang="en-US" sz="1500"/>
+          </a:p>
+          <a:p>
+            <a:pPr marL="0" indent="0">
+              <a:lnSpc>
+                <a:spcPts val="1950"/>
+              </a:lnSpc>
+              <a:spcAft>
+                <a:spcPts val="0"/>
+              </a:spcAft>
+              <a:buNone/>
+            </a:pPr>
+            <a:r>
+              <a:rPr lang="en-US" sz="1500" b="0">
+                <a:solidFill>
+                  <a:srgbClr val="202B33"/>
+                </a:solidFill>
+                <a:latin typeface="Arial"/>
+                <a:ea typeface="Arial"/>
+                <a:cs typeface="Arial"/>
+              </a:rPr>
+              <a:t xml:space="preserve">https://doi.org/10.1073/pnas.2422633122),</a:t>
+            </a:r>
+            <a:endParaRPr lang="en-US" sz="1500"/>
+          </a:p>
+          <a:p>
+            <a:pPr marL="0" indent="0">
+              <a:lnSpc>
+                <a:spcPts val="1950"/>
+              </a:lnSpc>
+              <a:spcAft>
+                <a:spcPts val="0"/>
+              </a:spcAft>
+              <a:buNone/>
+            </a:pPr>
+            <a:r>
+              <a:rPr lang="en-US" sz="1500" b="0">
+                <a:solidFill>
+                  <a:srgbClr val="202B33"/>
+                </a:solidFill>
+                <a:latin typeface="Arial"/>
+                <a:ea typeface="Arial"/>
+                <a:cs typeface="Arial"/>
+              </a:rPr>
+              <a:t xml:space="preserve">PNAS. The</a:t>
             </a:r>
             <a:endParaRPr lang="en-US" sz="1500"/>
           </a:p>
@@ -5388,122 +5227,53 @@
                 <a:ea typeface="Arial"/>
                 <a:cs typeface="Arial"/>
               </a:rPr>
-              <a:t xml:space="preserve">Bastani et al. (2025), Generative AI</a:t>
-            </a:r>
-            <a:endParaRPr lang="en-US" sz="1500"/>
-          </a:p>
-          <a:p>
-            <a:pPr marL="0" indent="0">
-              <a:lnSpc>
-                <a:spcPts val="1950"/>
-              </a:lnSpc>
-              <a:spcAft>
-                <a:spcPts val="0"/>
-              </a:spcAft>
-              <a:buNone/>
-            </a:pPr>
-            <a:r>
-              <a:rPr lang="en-US" sz="1500" b="0">
-                <a:solidFill>
-                  <a:srgbClr val="202B33"/>
-                </a:solidFill>
-                <a:latin typeface="Arial"/>
-                <a:ea typeface="Arial"/>
-                <a:cs typeface="Arial"/>
-              </a:rPr>
-              <a:t xml:space="preserve">without guardrails can harm learning —</a:t>
-            </a:r>
-            <a:endParaRPr lang="en-US" sz="1500"/>
-          </a:p>
-          <a:p>
-            <a:pPr marL="0" indent="0">
-              <a:lnSpc>
-                <a:spcPts val="1950"/>
-              </a:lnSpc>
-              <a:spcAft>
-                <a:spcPts val="0"/>
-              </a:spcAft>
-              <a:buNone/>
-            </a:pPr>
-            <a:r>
-              <a:rPr lang="en-US" sz="1500" b="0">
-                <a:solidFill>
-                  <a:srgbClr val="202B33"/>
-                </a:solidFill>
-                <a:latin typeface="Arial"/>
-                <a:ea typeface="Arial"/>
-                <a:cs typeface="Arial"/>
-              </a:rPr>
-              <a:t xml:space="preserve">https://doi.org/10.1073/pnas.2422633122),</a:t>
-            </a:r>
-            <a:endParaRPr lang="en-US" sz="1500"/>
-          </a:p>
-          <a:p>
-            <a:pPr marL="0" indent="0">
-              <a:lnSpc>
-                <a:spcPts val="1950"/>
-              </a:lnSpc>
-              <a:spcAft>
-                <a:spcPts val="0"/>
-              </a:spcAft>
-              <a:buNone/>
-            </a:pPr>
-            <a:r>
-              <a:rPr lang="en-US" sz="1500" b="0">
-                <a:solidFill>
-                  <a:srgbClr val="202B33"/>
-                </a:solidFill>
-                <a:latin typeface="Arial"/>
-                <a:ea typeface="Arial"/>
-                <a:cs typeface="Arial"/>
-              </a:rPr>
-              <a:t xml:space="preserve">PNAS. A</a:t>
-            </a:r>
-            <a:endParaRPr lang="en-US" sz="1500"/>
-          </a:p>
-          <a:p>
-            <a:pPr marL="0" indent="0">
-              <a:lnSpc>
-                <a:spcPts val="1950"/>
-              </a:lnSpc>
-              <a:spcAft>
-                <a:spcPts val="0"/>
-              </a:spcAft>
-              <a:buNone/>
-            </a:pPr>
-            <a:r>
-              <a:rPr lang="en-US" sz="1500" b="0">
-                <a:solidFill>
-                  <a:srgbClr val="202B33"/>
-                </a:solidFill>
-                <a:latin typeface="Arial"/>
-                <a:ea typeface="Arial"/>
-                <a:cs typeface="Arial"/>
-              </a:rPr>
-              <a:t xml:space="preserve">[correction](https://doi.org/10.1073/pnas.2518204122</a:t>
-            </a:r>
-            <a:endParaRPr lang="en-US" sz="1500"/>
-          </a:p>
-          <a:p>
-            <a:pPr marL="0" indent="0">
-              <a:lnSpc>
-                <a:spcPts val="1950"/>
-              </a:lnSpc>
-              <a:spcAft>
-                <a:spcPts val="0"/>
-              </a:spcAft>
-              <a:buNone/>
-            </a:pPr>
-            <a:r>
-              <a:rPr lang="en-US" sz="1500" b="0">
-                <a:solidFill>
-                  <a:srgbClr val="202B33"/>
-                </a:solidFill>
-                <a:latin typeface="Arial"/>
-                <a:ea typeface="Arial"/>
-                <a:cs typeface="Arial"/>
-              </a:rPr>
-              <a:t xml:space="preserve">exists; check it before quoting figures.</a:t>
+              <a:t xml:space="preserve">[correction](https://doi.org/10.1073/pnas.2518204122)</a:t>
+            </a:r>
+            <a:endParaRPr lang="en-US" sz="1500"/>
+          </a:p>
+          <a:p>
+            <a:pPr marL="0" indent="0">
+              <a:lnSpc>
+                <a:spcPts val="1950"/>
+              </a:lnSpc>
+              <a:spcAft>
+                <a:spcPts val="0"/>
+              </a:spcAft>
+              <a:buNone/>
+            </a:pPr>
+            <a:r>
+              <a:rPr lang="en-US" sz="1500" b="0">
+                <a:solidFill>
+                  <a:srgbClr val="202B33"/>
+                </a:solidFill>
+                <a:latin typeface="Arial"/>
+                <a:ea typeface="Arial"/>
+                <a:cs typeface="Arial"/>
+              </a:rPr>
+              <a:t xml:space="preserve">(August 2025 fixes an author affiliation;</a:t>
+            </a:r>
+            <a:endParaRPr lang="en-US" sz="1500"/>
+          </a:p>
+          <a:p>
+            <a:pPr marL="0" indent="0">
+              <a:lnSpc>
+                <a:spcPts val="1950"/>
+              </a:lnSpc>
+              <a:spcAft>
+                <a:spcPts val="0"/>
+              </a:spcAft>
+              <a:buNone/>
+            </a:pPr>
+            <a:r>
+              <a:rPr lang="en-US" sz="1500" b="0">
+                <a:solidFill>
+                  <a:srgbClr val="202B33"/>
+                </a:solidFill>
+                <a:latin typeface="Arial"/>
+                <a:ea typeface="Arial"/>
+                <a:cs typeface="Arial"/>
+              </a:rPr>
+              <a:t xml:space="preserve">no result changed.</a:t>
             </a:r>
             <a:endParaRPr lang="en-US" sz="1500"/>
           </a:p>
@@ -9455,7 +9225,7 @@
                 <a:ea typeface="Arial"/>
                 <a:cs typeface="Arial"/>
               </a:rPr>
-              <a:t xml:space="preserve">Demo: the four-minute reconstruction</a:t>
+              <a:t xml:space="preserve">Demo: four minutes inside a five-minute slide</a:t>
             </a:r>
             <a:endParaRPr lang="en-US" sz="2550"/>
           </a:p>
@@ -9619,76 +9389,76 @@
                 <a:ea typeface="Arial"/>
                 <a:cs typeface="Arial"/>
               </a:rPr>
-              <a:t xml:space="preserve">Run the two scripted learners from the</a:t>
-            </a:r>
-            <a:endParaRPr lang="en-US" sz="1500"/>
-          </a:p>
-          <a:p>
-            <a:pPr marL="0" indent="0">
-              <a:lnSpc>
-                <a:spcPts val="1950"/>
-              </a:lnSpc>
-              <a:spcAft>
-                <a:spcPts val="0"/>
-              </a:spcAft>
-              <a:buNone/>
-            </a:pPr>
-            <a:r>
-              <a:rPr lang="en-US" sz="1500" b="0">
-                <a:solidFill>
-                  <a:srgbClr val="202B33"/>
-                </a:solidFill>
-                <a:latin typeface="Arial"/>
-                <a:ea typeface="Arial"/>
-                <a:cs typeface="Arial"/>
-              </a:rPr>
-              <a:t xml:space="preserve">runbook, then go live. Reveal the wrong</a:t>
-            </a:r>
-            <a:endParaRPr lang="en-US" sz="1500"/>
-          </a:p>
-          <a:p>
-            <a:pPr marL="0" indent="0">
-              <a:lnSpc>
-                <a:spcPts val="1950"/>
-              </a:lnSpc>
-              <a:spcAft>
-                <a:spcPts val="0"/>
-              </a:spcAft>
-              <a:buNone/>
-            </a:pPr>
-            <a:r>
-              <a:rPr lang="en-US" sz="1500" b="0">
-                <a:solidFill>
-                  <a:srgbClr val="202B33"/>
-                </a:solidFill>
-                <a:latin typeface="Arial"/>
-                <a:ea typeface="Arial"/>
-                <a:cs typeface="Arial"/>
-              </a:rPr>
-              <a:t xml:space="preserve">argument. Let the room find the base.</a:t>
-            </a:r>
-            <a:endParaRPr lang="en-US" sz="1500"/>
-          </a:p>
-          <a:p>
-            <a:pPr marL="0" indent="0">
-              <a:lnSpc>
-                <a:spcPts val="1950"/>
-              </a:lnSpc>
-              <a:spcAft>
-                <a:spcPts val="0"/>
-              </a:spcAft>
-              <a:buNone/>
-            </a:pPr>
-            <a:r>
-              <a:rPr lang="en-US" sz="1500" b="0">
-                <a:solidFill>
-                  <a:srgbClr val="202B33"/>
-                </a:solidFill>
-                <a:latin typeface="Arial"/>
-                <a:ea typeface="Arial"/>
-                <a:cs typeface="Arial"/>
-              </a:rPr>
-              <a:t xml:space="preserve">Reveal $120 only after the diagnostic</a:t>
+              <a:t xml:space="preserve">Run the scripted tutor turns — from the kit</a:t>
+            </a:r>
+            <a:endParaRPr lang="en-US" sz="1500"/>
+          </a:p>
+          <a:p>
+            <a:pPr marL="0" indent="0">
+              <a:lnSpc>
+                <a:spcPts val="1950"/>
+              </a:lnSpc>
+              <a:spcAft>
+                <a:spcPts val="0"/>
+              </a:spcAft>
+              <a:buNone/>
+            </a:pPr>
+            <a:r>
+              <a:rPr lang="en-US" sz="1500" b="0">
+                <a:solidFill>
+                  <a:srgbClr val="202B33"/>
+                </a:solidFill>
+                <a:latin typeface="Arial"/>
+                <a:ea typeface="Arial"/>
+                <a:cs typeface="Arial"/>
+              </a:rPr>
+              <a:t xml:space="preserve">or read off the card — then go live. Reveal</a:t>
+            </a:r>
+            <a:endParaRPr lang="en-US" sz="1500"/>
+          </a:p>
+          <a:p>
+            <a:pPr marL="0" indent="0">
+              <a:lnSpc>
+                <a:spcPts val="1950"/>
+              </a:lnSpc>
+              <a:spcAft>
+                <a:spcPts val="0"/>
+              </a:spcAft>
+              <a:buNone/>
+            </a:pPr>
+            <a:r>
+              <a:rPr lang="en-US" sz="1500" b="0">
+                <a:solidFill>
+                  <a:srgbClr val="202B33"/>
+                </a:solidFill>
+                <a:latin typeface="Arial"/>
+                <a:ea typeface="Arial"/>
+                <a:cs typeface="Arial"/>
+              </a:rPr>
+              <a:t xml:space="preserve">the wrong argument. Let the room find the</a:t>
+            </a:r>
+            <a:endParaRPr lang="en-US" sz="1500"/>
+          </a:p>
+          <a:p>
+            <a:pPr marL="0" indent="0">
+              <a:lnSpc>
+                <a:spcPts val="1950"/>
+              </a:lnSpc>
+              <a:spcAft>
+                <a:spcPts val="0"/>
+              </a:spcAft>
+              <a:buNone/>
+            </a:pPr>
+            <a:r>
+              <a:rPr lang="en-US" sz="1500" b="0">
+                <a:solidFill>
+                  <a:srgbClr val="202B33"/>
+                </a:solidFill>
+                <a:latin typeface="Arial"/>
+                <a:ea typeface="Arial"/>
+                <a:cs typeface="Arial"/>
+              </a:rPr>
+              <a:t xml:space="preserve">base. Reveal $120 only after the diagnostic</a:t>
             </a:r>
             <a:endParaRPr lang="en-US" sz="1500"/>
           </a:p>
@@ -10219,7 +9989,7 @@
                 <a:ea typeface="Arial"/>
                 <a:cs typeface="Arial"/>
               </a:rPr>
-              <a:t xml:space="preserve">Score the reasoning, then write down what you saw</a:t>
+              <a:t xml:space="preserve">Score the reasoning. Write it down</a:t>
             </a:r>
             <a:endParaRPr lang="en-US" sz="2550"/>
           </a:p>
@@ -10571,29 +10341,6 @@
             </a:r>
             <a:endParaRPr lang="en-US" sz="1500"/>
           </a:p>
-          <a:p>
-            <a:pPr marL="0" indent="0">
-              <a:lnSpc>
-                <a:spcPts val="1950"/>
-              </a:lnSpc>
-              <a:spcAft>
-                <a:spcPts val="0"/>
-              </a:spcAft>
-              <a:buNone/>
-            </a:pPr>
-            <a:r>
-              <a:rPr lang="en-US" sz="1500" b="0">
-                <a:solidFill>
-                  <a:srgbClr val="202B33"/>
-                </a:solidFill>
-                <a:latin typeface="Arial"/>
-                <a:ea typeface="Arial"/>
-                <a:cs typeface="Arial"/>
-              </a:rPr>
-              <a:t xml:space="preserve">it, and asking a question costs nothing.</a:t>
-            </a:r>
-            <a:endParaRPr lang="en-US" sz="1500"/>
-          </a:p>
         </p:txBody>
       </p:sp>
       <p:sp>
@@ -10639,30 +10386,7 @@
                 <a:ea typeface="Arial"/>
                 <a:cs typeface="Arial"/>
               </a:rPr>
-              <a:t xml:space="preserve">Try the rubric on sample work before it</a:t>
-            </a:r>
-            <a:endParaRPr lang="en-US" sz="1500"/>
-          </a:p>
-          <a:p>
-            <a:pPr marL="0" indent="0">
-              <a:lnSpc>
-                <a:spcPts val="1950"/>
-              </a:lnSpc>
-              <a:spcAft>
-                <a:spcPts val="0"/>
-              </a:spcAft>
-              <a:buNone/>
-            </a:pPr>
-            <a:r>
-              <a:rPr lang="en-US" sz="1500" b="0">
-                <a:solidFill>
-                  <a:srgbClr val="202B33"/>
-                </a:solidFill>
-                <a:latin typeface="Arial"/>
-                <a:ea typeface="Arial"/>
-                <a:cs typeface="Arial"/>
-              </a:rPr>
-              <a:t xml:space="preserve">touches a grade.</a:t>
+              <a:t xml:space="preserve">it, and asking a question costs nothing.</a:t>
             </a:r>
             <a:endParaRPr lang="en-US" sz="1500"/>
           </a:p>
@@ -11496,6 +11220,167 @@
             </a:r>
             <a:endParaRPr lang="en-US" sz="1500"/>
           </a:p>
+          <a:p>
+            <a:pPr marL="0" indent="0">
+              <a:lnSpc>
+                <a:spcPts val="1950"/>
+              </a:lnSpc>
+              <a:spcAft>
+                <a:spcPts val="0"/>
+              </a:spcAft>
+              <a:buNone/>
+            </a:pPr>
+            <a:r>
+              <a:rPr lang="en-US" sz="1500" b="0">
+                <a:solidFill>
+                  <a:srgbClr val="202B33"/>
+                </a:solidFill>
+                <a:latin typeface="Arial"/>
+                <a:ea typeface="Arial"/>
+                <a:cs typeface="Arial"/>
+              </a:rPr>
+              <a:t xml:space="preserve">and jumps. They mispronounce a word they'd</a:t>
+            </a:r>
+            <a:endParaRPr lang="en-US" sz="1500"/>
+          </a:p>
+          <a:p>
+            <a:pPr marL="0" indent="0">
+              <a:lnSpc>
+                <a:spcPts val="1950"/>
+              </a:lnSpc>
+              <a:spcAft>
+                <a:spcPts val="0"/>
+              </a:spcAft>
+              <a:buNone/>
+            </a:pPr>
+            <a:r>
+              <a:rPr lang="en-US" sz="1500" b="0">
+                <a:solidFill>
+                  <a:srgbClr val="202B33"/>
+                </a:solidFill>
+                <a:latin typeface="Arial"/>
+                <a:ea typeface="Arial"/>
+                <a:cs typeface="Arial"/>
+              </a:rPr>
+              <a:t xml:space="preserve">never have chosen. Spoken language carries</a:t>
+            </a:r>
+            <a:endParaRPr lang="en-US" sz="1500"/>
+          </a:p>
+          <a:p>
+            <a:pPr marL="0" indent="0">
+              <a:lnSpc>
+                <a:spcPts val="1950"/>
+              </a:lnSpc>
+              <a:spcAft>
+                <a:spcPts val="0"/>
+              </a:spcAft>
+              <a:buNone/>
+            </a:pPr>
+            <a:r>
+              <a:rPr lang="en-US" sz="1500" b="0">
+                <a:solidFill>
+                  <a:srgbClr val="202B33"/>
+                </a:solidFill>
+                <a:latin typeface="Arial"/>
+                <a:ea typeface="Arial"/>
+                <a:cs typeface="Arial"/>
+              </a:rPr>
+              <a:t xml:space="preserve">enough tells to sort likely from unlikely.</a:t>
+            </a:r>
+            <a:endParaRPr lang="en-US" sz="1500"/>
+          </a:p>
+          <a:p>
+            <a:pPr marL="0" indent="0">
+              <a:lnSpc>
+                <a:spcPts val="1950"/>
+              </a:lnSpc>
+              <a:spcAft>
+                <a:spcPts val="0"/>
+              </a:spcAft>
+              <a:buNone/>
+            </a:pPr>
+            <a:r>
+              <a:rPr lang="en-US" sz="1500" b="0">
+                <a:solidFill>
+                  <a:srgbClr val="202B33"/>
+                </a:solidFill>
+                <a:latin typeface="Arial"/>
+                <a:ea typeface="Arial"/>
+                <a:cs typeface="Arial"/>
+              </a:rPr>
+              <a:t xml:space="preserve"/>
+            </a:r>
+            <a:endParaRPr lang="en-US" sz="1500"/>
+          </a:p>
+          <a:p>
+            <a:pPr marL="0" indent="0">
+              <a:lnSpc>
+                <a:spcPts val="1950"/>
+              </a:lnSpc>
+              <a:spcAft>
+                <a:spcPts val="0"/>
+              </a:spcAft>
+              <a:buNone/>
+            </a:pPr>
+            <a:r>
+              <a:rPr lang="en-US" sz="1500" b="0">
+                <a:solidFill>
+                  <a:srgbClr val="202B33"/>
+                </a:solidFill>
+                <a:latin typeface="Arial"/>
+                <a:ea typeface="Arial"/>
+                <a:cs typeface="Arial"/>
+              </a:rPr>
+              <a:t xml:space="preserve">Small groups, speaking, in class: that</a:t>
+            </a:r>
+            <a:endParaRPr lang="en-US" sz="1500"/>
+          </a:p>
+          <a:p>
+            <a:pPr marL="0" indent="0">
+              <a:lnSpc>
+                <a:spcPts val="1950"/>
+              </a:lnSpc>
+              <a:spcAft>
+                <a:spcPts val="0"/>
+              </a:spcAft>
+              <a:buNone/>
+            </a:pPr>
+            <a:r>
+              <a:rPr lang="en-US" sz="1500" b="0">
+                <a:solidFill>
+                  <a:srgbClr val="202B33"/>
+                </a:solidFill>
+                <a:latin typeface="Arial"/>
+                <a:ea typeface="Arial"/>
+                <a:cs typeface="Arial"/>
+              </a:rPr>
+              <a:t xml:space="preserve">resets the table. It adds social pressure</a:t>
+            </a:r>
+            <a:endParaRPr lang="en-US" sz="1500"/>
+          </a:p>
+          <a:p>
+            <a:pPr marL="0" indent="0">
+              <a:lnSpc>
+                <a:spcPts val="1950"/>
+              </a:lnSpc>
+              <a:spcAft>
+                <a:spcPts val="0"/>
+              </a:spcAft>
+              <a:buNone/>
+            </a:pPr>
+            <a:r>
+              <a:rPr lang="en-US" sz="1500" b="0">
+                <a:solidFill>
+                  <a:srgbClr val="202B33"/>
+                </a:solidFill>
+                <a:latin typeface="Arial"/>
+                <a:ea typeface="Arial"/>
+                <a:cs typeface="Arial"/>
+              </a:rPr>
+              <a:t xml:space="preserve">against cheating and hands you knobs on an</a:t>
+            </a:r>
+            <a:endParaRPr lang="en-US" sz="1500"/>
+          </a:p>
         </p:txBody>
       </p:sp>
       <p:sp>
@@ -11541,76 +11426,99 @@
                 <a:ea typeface="Arial"/>
                 <a:cs typeface="Arial"/>
               </a:rPr>
-              <a:t xml:space="preserve">and jumps. They mispronounce a word they'd</a:t>
-            </a:r>
-            <a:endParaRPr lang="en-US" sz="1500"/>
-          </a:p>
-          <a:p>
-            <a:pPr marL="0" indent="0">
-              <a:lnSpc>
-                <a:spcPts val="1950"/>
-              </a:lnSpc>
-              <a:spcAft>
-                <a:spcPts val="0"/>
-              </a:spcAft>
-              <a:buNone/>
-            </a:pPr>
-            <a:r>
-              <a:rPr lang="en-US" sz="1500" b="0">
-                <a:solidFill>
-                  <a:srgbClr val="202B33"/>
-                </a:solidFill>
-                <a:latin typeface="Arial"/>
-                <a:ea typeface="Arial"/>
-                <a:cs typeface="Arial"/>
-              </a:rPr>
-              <a:t xml:space="preserve">never have chosen. Spoken language carries</a:t>
-            </a:r>
-            <a:endParaRPr lang="en-US" sz="1500"/>
-          </a:p>
-          <a:p>
-            <a:pPr marL="0" indent="0">
-              <a:lnSpc>
-                <a:spcPts val="1950"/>
-              </a:lnSpc>
-              <a:spcAft>
-                <a:spcPts val="0"/>
-              </a:spcAft>
-              <a:buNone/>
-            </a:pPr>
-            <a:r>
-              <a:rPr lang="en-US" sz="1500" b="0">
-                <a:solidFill>
-                  <a:srgbClr val="202B33"/>
-                </a:solidFill>
-                <a:latin typeface="Arial"/>
-                <a:ea typeface="Arial"/>
-                <a:cs typeface="Arial"/>
-              </a:rPr>
-              <a:t xml:space="preserve">enough tells to sort likely from unlikely,</a:t>
-            </a:r>
-            <a:endParaRPr lang="en-US" sz="1500"/>
-          </a:p>
-          <a:p>
-            <a:pPr marL="0" indent="0">
-              <a:lnSpc>
-                <a:spcPts val="1950"/>
-              </a:lnSpc>
-              <a:spcAft>
-                <a:spcPts val="0"/>
-              </a:spcAft>
-              <a:buNone/>
-            </a:pPr>
-            <a:r>
-              <a:rPr lang="en-US" sz="1500" b="0">
-                <a:solidFill>
-                  <a:srgbClr val="202B33"/>
-                </a:solidFill>
-                <a:latin typeface="Arial"/>
-                <a:ea typeface="Arial"/>
-                <a:cs typeface="Arial"/>
-              </a:rPr>
-              <a:t xml:space="preserve">never to convict.</a:t>
+              <a:t xml:space="preserve">incentive structure that today is a magical</a:t>
+            </a:r>
+            <a:endParaRPr lang="en-US" sz="1500"/>
+          </a:p>
+          <a:p>
+            <a:pPr marL="0" indent="0">
+              <a:lnSpc>
+                <a:spcPts val="1950"/>
+              </a:lnSpc>
+              <a:spcAft>
+                <a:spcPts val="0"/>
+              </a:spcAft>
+              <a:buNone/>
+            </a:pPr>
+            <a:r>
+              <a:rPr lang="en-US" sz="1500" b="0">
+                <a:solidFill>
+                  <a:srgbClr val="202B33"/>
+                </a:solidFill>
+                <a:latin typeface="Arial"/>
+                <a:ea typeface="Arial"/>
+                <a:cs typeface="Arial"/>
+              </a:rPr>
+              <a:t xml:space="preserve">cheating genie. Not foolproof. A student</a:t>
+            </a:r>
+            <a:endParaRPr lang="en-US" sz="1500"/>
+          </a:p>
+          <a:p>
+            <a:pPr marL="0" indent="0">
+              <a:lnSpc>
+                <a:spcPts val="1950"/>
+              </a:lnSpc>
+              <a:spcAft>
+                <a:spcPts val="0"/>
+              </a:spcAft>
+              <a:buNone/>
+            </a:pPr>
+            <a:r>
+              <a:rPr lang="en-US" sz="1500" b="0">
+                <a:solidFill>
+                  <a:srgbClr val="202B33"/>
+                </a:solidFill>
+                <a:latin typeface="Arial"/>
+                <a:ea typeface="Arial"/>
+                <a:cs typeface="Arial"/>
+              </a:rPr>
+              <a:t xml:space="preserve">can build an agent told to seem dumb at</a:t>
+            </a:r>
+            <a:endParaRPr lang="en-US" sz="1500"/>
+          </a:p>
+          <a:p>
+            <a:pPr marL="0" indent="0">
+              <a:lnSpc>
+                <a:spcPts val="1950"/>
+              </a:lnSpc>
+              <a:spcAft>
+                <a:spcPts val="0"/>
+              </a:spcAft>
+              <a:buNone/>
+            </a:pPr>
+            <a:r>
+              <a:rPr lang="en-US" sz="1500" b="0">
+                <a:solidFill>
+                  <a:srgbClr val="202B33"/>
+                </a:solidFill>
+                <a:latin typeface="Arial"/>
+                <a:ea typeface="Arial"/>
+                <a:cs typeface="Arial"/>
+              </a:rPr>
+              <a:t xml:space="preserve">first and then learn. Fine. We're changing</a:t>
+            </a:r>
+            <a:endParaRPr lang="en-US" sz="1500"/>
+          </a:p>
+          <a:p>
+            <a:pPr marL="0" indent="0">
+              <a:lnSpc>
+                <a:spcPts val="1950"/>
+              </a:lnSpc>
+              <a:spcAft>
+                <a:spcPts val="0"/>
+              </a:spcAft>
+              <a:buNone/>
+            </a:pPr>
+            <a:r>
+              <a:rPr lang="en-US" sz="1500" b="0">
+                <a:solidFill>
+                  <a:srgbClr val="202B33"/>
+                </a:solidFill>
+                <a:latin typeface="Arial"/>
+                <a:ea typeface="Arial"/>
+                <a:cs typeface="Arial"/>
+              </a:rPr>
+              <a:t xml:space="preserve">incentives, not buying certainty.</a:t>
             </a:r>
             <a:endParaRPr lang="en-US" sz="1500"/>
           </a:p>
@@ -11656,168 +11564,306 @@
                 <a:ea typeface="Arial"/>
                 <a:cs typeface="Arial"/>
               </a:rPr>
-              <a:t xml:space="preserve">Small groups, speaking, in class: that</a:t>
-            </a:r>
-            <a:endParaRPr lang="en-US" sz="1500"/>
-          </a:p>
-          <a:p>
-            <a:pPr marL="0" indent="0">
-              <a:lnSpc>
-                <a:spcPts val="1950"/>
-              </a:lnSpc>
-              <a:spcAft>
-                <a:spcPts val="0"/>
-              </a:spcAft>
-              <a:buNone/>
-            </a:pPr>
-            <a:r>
-              <a:rPr lang="en-US" sz="1500" b="0">
-                <a:solidFill>
-                  <a:srgbClr val="202B33"/>
-                </a:solidFill>
-                <a:latin typeface="Arial"/>
-                <a:ea typeface="Arial"/>
-                <a:cs typeface="Arial"/>
-              </a:rPr>
-              <a:t xml:space="preserve">resets the table. It adds social pressure</a:t>
-            </a:r>
-            <a:endParaRPr lang="en-US" sz="1500"/>
-          </a:p>
-          <a:p>
-            <a:pPr marL="0" indent="0">
-              <a:lnSpc>
-                <a:spcPts val="1950"/>
-              </a:lnSpc>
-              <a:spcAft>
-                <a:spcPts val="0"/>
-              </a:spcAft>
-              <a:buNone/>
-            </a:pPr>
-            <a:r>
-              <a:rPr lang="en-US" sz="1500" b="0">
-                <a:solidFill>
-                  <a:srgbClr val="202B33"/>
-                </a:solidFill>
-                <a:latin typeface="Arial"/>
-                <a:ea typeface="Arial"/>
-                <a:cs typeface="Arial"/>
-              </a:rPr>
-              <a:t xml:space="preserve">against cheating and hands you knobs on an</a:t>
-            </a:r>
-            <a:endParaRPr lang="en-US" sz="1500"/>
-          </a:p>
-          <a:p>
-            <a:pPr marL="0" indent="0">
-              <a:lnSpc>
-                <a:spcPts val="1950"/>
-              </a:lnSpc>
-              <a:spcAft>
-                <a:spcPts val="0"/>
-              </a:spcAft>
-              <a:buNone/>
-            </a:pPr>
-            <a:r>
-              <a:rPr lang="en-US" sz="1500" b="0">
-                <a:solidFill>
-                  <a:srgbClr val="202B33"/>
-                </a:solidFill>
-                <a:latin typeface="Arial"/>
-                <a:ea typeface="Arial"/>
-                <a:cs typeface="Arial"/>
-              </a:rPr>
-              <a:t xml:space="preserve">incentive structure that today is a magical</a:t>
-            </a:r>
-            <a:endParaRPr lang="en-US" sz="1500"/>
-          </a:p>
-          <a:p>
-            <a:pPr marL="0" indent="0">
-              <a:lnSpc>
-                <a:spcPts val="1950"/>
-              </a:lnSpc>
-              <a:spcAft>
-                <a:spcPts val="0"/>
-              </a:spcAft>
-              <a:buNone/>
-            </a:pPr>
-            <a:r>
-              <a:rPr lang="en-US" sz="1500" b="0">
-                <a:solidFill>
-                  <a:srgbClr val="202B33"/>
-                </a:solidFill>
-                <a:latin typeface="Arial"/>
-                <a:ea typeface="Arial"/>
-                <a:cs typeface="Arial"/>
-              </a:rPr>
-              <a:t xml:space="preserve">cheating genie. Not foolproof. A student</a:t>
-            </a:r>
-            <a:endParaRPr lang="en-US" sz="1500"/>
-          </a:p>
-          <a:p>
-            <a:pPr marL="0" indent="0">
-              <a:lnSpc>
-                <a:spcPts val="1950"/>
-              </a:lnSpc>
-              <a:spcAft>
-                <a:spcPts val="0"/>
-              </a:spcAft>
-              <a:buNone/>
-            </a:pPr>
-            <a:r>
-              <a:rPr lang="en-US" sz="1500" b="0">
-                <a:solidFill>
-                  <a:srgbClr val="202B33"/>
-                </a:solidFill>
-                <a:latin typeface="Arial"/>
-                <a:ea typeface="Arial"/>
-                <a:cs typeface="Arial"/>
-              </a:rPr>
-              <a:t xml:space="preserve">can build an agent told to seem dumb at</a:t>
-            </a:r>
-            <a:endParaRPr lang="en-US" sz="1500"/>
-          </a:p>
-          <a:p>
-            <a:pPr marL="0" indent="0">
-              <a:lnSpc>
-                <a:spcPts val="1950"/>
-              </a:lnSpc>
-              <a:spcAft>
-                <a:spcPts val="0"/>
-              </a:spcAft>
-              <a:buNone/>
-            </a:pPr>
-            <a:r>
-              <a:rPr lang="en-US" sz="1500" b="0">
-                <a:solidFill>
-                  <a:srgbClr val="202B33"/>
-                </a:solidFill>
-                <a:latin typeface="Arial"/>
-                <a:ea typeface="Arial"/>
-                <a:cs typeface="Arial"/>
-              </a:rPr>
-              <a:t xml:space="preserve">first and then learn. Fine. We're changing</a:t>
-            </a:r>
-            <a:endParaRPr lang="en-US" sz="1500"/>
-          </a:p>
-          <a:p>
-            <a:pPr marL="0" indent="0">
-              <a:lnSpc>
-                <a:spcPts val="1950"/>
-              </a:lnSpc>
-              <a:spcAft>
-                <a:spcPts val="0"/>
-              </a:spcAft>
-              <a:buNone/>
-            </a:pPr>
-            <a:r>
-              <a:rPr lang="en-US" sz="1500" b="0">
-                <a:solidFill>
-                  <a:srgbClr val="202B33"/>
-                </a:solidFill>
-                <a:latin typeface="Arial"/>
-                <a:ea typeface="Arial"/>
-                <a:cs typeface="Arial"/>
-              </a:rPr>
-              <a:t xml:space="preserve">incentives, not buying certainty.</a:t>
+              <a:t xml:space="preserve">Now the care, and it's real. A student's</a:t>
+            </a:r>
+            <a:endParaRPr lang="en-US" sz="1500"/>
+          </a:p>
+          <a:p>
+            <a:pPr marL="0" indent="0">
+              <a:lnSpc>
+                <a:spcPts val="1950"/>
+              </a:lnSpc>
+              <a:spcAft>
+                <a:spcPts val="0"/>
+              </a:spcAft>
+              <a:buNone/>
+            </a:pPr>
+            <a:r>
+              <a:rPr lang="en-US" sz="1500" b="0">
+                <a:solidFill>
+                  <a:srgbClr val="202B33"/>
+                </a:solidFill>
+                <a:latin typeface="Arial"/>
+                <a:ea typeface="Arial"/>
+                <a:cs typeface="Arial"/>
+              </a:rPr>
+              <a:t xml:space="preserve">voice identifies them and can be cloned.</a:t>
+            </a:r>
+            <a:endParaRPr lang="en-US" sz="1500"/>
+          </a:p>
+          <a:p>
+            <a:pPr marL="0" indent="0">
+              <a:lnSpc>
+                <a:spcPts val="1950"/>
+              </a:lnSpc>
+              <a:spcAft>
+                <a:spcPts val="0"/>
+              </a:spcAft>
+              <a:buNone/>
+            </a:pPr>
+            <a:r>
+              <a:rPr lang="en-US" sz="1500" b="0">
+                <a:solidFill>
+                  <a:srgbClr val="202B33"/>
+                </a:solidFill>
+                <a:latin typeface="Arial"/>
+                <a:ea typeface="Arial"/>
+                <a:cs typeface="Arial"/>
+              </a:rPr>
+              <a:t xml:space="preserve">Fingerprinting voices is plausible</a:t>
+            </a:r>
+            <a:endParaRPr lang="en-US" sz="1500"/>
+          </a:p>
+          <a:p>
+            <a:pPr marL="0" indent="0">
+              <a:lnSpc>
+                <a:spcPts val="1950"/>
+              </a:lnSpc>
+              <a:spcAft>
+                <a:spcPts val="0"/>
+              </a:spcAft>
+              <a:buNone/>
+            </a:pPr>
+            <a:r>
+              <a:rPr lang="en-US" sz="1500" b="0">
+                <a:solidFill>
+                  <a:srgbClr val="202B33"/>
+                </a:solidFill>
+                <a:latin typeface="Arial"/>
+                <a:ea typeface="Arial"/>
+                <a:cs typeface="Arial"/>
+              </a:rPr>
+              <a:t xml:space="preserve">technology; that's a reason for caution,</a:t>
+            </a:r>
+            <a:endParaRPr lang="en-US" sz="1500"/>
+          </a:p>
+          <a:p>
+            <a:pPr marL="0" indent="0">
+              <a:lnSpc>
+                <a:spcPts val="1950"/>
+              </a:lnSpc>
+              <a:spcAft>
+                <a:spcPts val="0"/>
+              </a:spcAft>
+              <a:buNone/>
+            </a:pPr>
+            <a:r>
+              <a:rPr lang="en-US" sz="1500" b="0">
+                <a:solidFill>
+                  <a:srgbClr val="202B33"/>
+                </a:solidFill>
+                <a:latin typeface="Arial"/>
+                <a:ea typeface="Arial"/>
+                <a:cs typeface="Arial"/>
+              </a:rPr>
+              <a:t xml:space="preserve">not a feature. Newer offline models claim</a:t>
+            </a:r>
+            <a:endParaRPr lang="en-US" sz="1500"/>
+          </a:p>
+          <a:p>
+            <a:pPr marL="0" indent="0">
+              <a:lnSpc>
+                <a:spcPts val="1950"/>
+              </a:lnSpc>
+              <a:spcAft>
+                <a:spcPts val="0"/>
+              </a:spcAft>
+              <a:buNone/>
+            </a:pPr>
+            <a:r>
+              <a:rPr lang="en-US" sz="1500" b="0">
+                <a:solidFill>
+                  <a:srgbClr val="202B33"/>
+                </a:solidFill>
+                <a:latin typeface="Arial"/>
+                <a:ea typeface="Arial"/>
+                <a:cs typeface="Arial"/>
+              </a:rPr>
+              <a:t xml:space="preserve">to detect frustration and distress in</a:t>
+            </a:r>
+            <a:endParaRPr lang="en-US" sz="1500"/>
+          </a:p>
+          <a:p>
+            <a:pPr marL="0" indent="0">
+              <a:lnSpc>
+                <a:spcPts val="1950"/>
+              </a:lnSpc>
+              <a:spcAft>
+                <a:spcPts val="0"/>
+              </a:spcAft>
+              <a:buNone/>
+            </a:pPr>
+            <a:r>
+              <a:rPr lang="en-US" sz="1500" b="0">
+                <a:solidFill>
+                  <a:srgbClr val="202B33"/>
+                </a:solidFill>
+                <a:latin typeface="Arial"/>
+                <a:ea typeface="Arial"/>
+                <a:cs typeface="Arial"/>
+              </a:rPr>
+              <a:t xml:space="preserve">speech, and offline is what lets them meet</a:t>
+            </a:r>
+            <a:endParaRPr lang="en-US" sz="1500"/>
+          </a:p>
+          <a:p>
+            <a:pPr marL="0" indent="0">
+              <a:lnSpc>
+                <a:spcPts val="1950"/>
+              </a:lnSpc>
+              <a:spcAft>
+                <a:spcPts val="0"/>
+              </a:spcAft>
+              <a:buNone/>
+            </a:pPr>
+            <a:r>
+              <a:rPr lang="en-US" sz="1500" b="0">
+                <a:solidFill>
+                  <a:srgbClr val="202B33"/>
+                </a:solidFill>
+                <a:latin typeface="Arial"/>
+                <a:ea typeface="Arial"/>
+                <a:cs typeface="Arial"/>
+              </a:rPr>
+              <a:t xml:space="preserve">zero-retention, no-sharing district rules</a:t>
+            </a:r>
+            <a:endParaRPr lang="en-US" sz="1500"/>
+          </a:p>
+          <a:p>
+            <a:pPr marL="0" indent="0">
+              <a:lnSpc>
+                <a:spcPts val="1950"/>
+              </a:lnSpc>
+              <a:spcAft>
+                <a:spcPts val="0"/>
+              </a:spcAft>
+              <a:buNone/>
+            </a:pPr>
+            <a:r>
+              <a:rPr lang="en-US" sz="1500" b="0">
+                <a:solidFill>
+                  <a:srgbClr val="202B33"/>
+                </a:solidFill>
+                <a:latin typeface="Arial"/>
+                <a:ea typeface="Arial"/>
+                <a:cs typeface="Arial"/>
+              </a:rPr>
+              <a:t xml:space="preserve">on modest hardware. Any student-facing</a:t>
+            </a:r>
+            <a:endParaRPr lang="en-US" sz="1500"/>
+          </a:p>
+          <a:p>
+            <a:pPr marL="0" indent="0">
+              <a:lnSpc>
+                <a:spcPts val="1950"/>
+              </a:lnSpc>
+              <a:spcAft>
+                <a:spcPts val="0"/>
+              </a:spcAft>
+              <a:buNone/>
+            </a:pPr>
+            <a:r>
+              <a:rPr lang="en-US" sz="1500" b="0">
+                <a:solidFill>
+                  <a:srgbClr val="202B33"/>
+                </a:solidFill>
+                <a:latin typeface="Arial"/>
+                <a:ea typeface="Arial"/>
+                <a:cs typeface="Arial"/>
+              </a:rPr>
+              <a:t xml:space="preserve">voice tool gets maximum privacy, a written</a:t>
+            </a:r>
+            <a:endParaRPr lang="en-US" sz="1500"/>
+          </a:p>
+          <a:p>
+            <a:pPr marL="0" indent="0">
+              <a:lnSpc>
+                <a:spcPts val="1950"/>
+              </a:lnSpc>
+              <a:spcAft>
+                <a:spcPts val="0"/>
+              </a:spcAft>
+              <a:buNone/>
+            </a:pPr>
+            <a:r>
+              <a:rPr lang="en-US" sz="1500" b="0">
+                <a:solidFill>
+                  <a:srgbClr val="202B33"/>
+                </a:solidFill>
+                <a:latin typeface="Arial"/>
+                <a:ea typeface="Arial"/>
+                <a:cs typeface="Arial"/>
+              </a:rPr>
+              <a:t xml:space="preserve">alternative, age-appropriate use only, and</a:t>
+            </a:r>
+            <a:endParaRPr lang="en-US" sz="1500"/>
+          </a:p>
+          <a:p>
+            <a:pPr marL="0" indent="0">
+              <a:lnSpc>
+                <a:spcPts val="1950"/>
+              </a:lnSpc>
+              <a:spcAft>
+                <a:spcPts val="0"/>
+              </a:spcAft>
+              <a:buNone/>
+            </a:pPr>
+            <a:r>
+              <a:rPr lang="en-US" sz="1500" b="0">
+                <a:solidFill>
+                  <a:srgbClr val="202B33"/>
+                </a:solidFill>
+                <a:latin typeface="Arial"/>
+                <a:ea typeface="Arial"/>
+                <a:cs typeface="Arial"/>
+              </a:rPr>
+              <a:t xml:space="preserve">a retention rule written before the first</a:t>
+            </a:r>
+            <a:endParaRPr lang="en-US" sz="1500"/>
+          </a:p>
+          <a:p>
+            <a:pPr marL="0" indent="0">
+              <a:lnSpc>
+                <a:spcPts val="1950"/>
+              </a:lnSpc>
+              <a:spcAft>
+                <a:spcPts val="0"/>
+              </a:spcAft>
+              <a:buNone/>
+            </a:pPr>
+            <a:r>
+              <a:rPr lang="en-US" sz="1500" b="0">
+                <a:solidFill>
+                  <a:srgbClr val="202B33"/>
+                </a:solidFill>
+                <a:latin typeface="Arial"/>
+                <a:ea typeface="Arial"/>
+                <a:cs typeface="Arial"/>
+              </a:rPr>
+              <a:t xml:space="preserve">recording. A replay is context, never</a:t>
+            </a:r>
+            <a:endParaRPr lang="en-US" sz="1500"/>
+          </a:p>
+          <a:p>
+            <a:pPr marL="0" indent="0">
+              <a:lnSpc>
+                <a:spcPts val="1950"/>
+              </a:lnSpc>
+              <a:spcAft>
+                <a:spcPts val="0"/>
+              </a:spcAft>
+              <a:buNone/>
+            </a:pPr>
+            <a:r>
+              <a:rPr lang="en-US" sz="1500" b="0">
+                <a:solidFill>
+                  <a:srgbClr val="202B33"/>
+                </a:solidFill>
+                <a:latin typeface="Arial"/>
+                <a:ea typeface="Arial"/>
+                <a:cs typeface="Arial"/>
+              </a:rPr>
+              <a:t xml:space="preserve">proof.</a:t>
             </a:r>
             <a:endParaRPr lang="en-US" sz="1500"/>
           </a:p>
@@ -12329,98 +12375,6 @@
             </a:r>
             <a:endParaRPr lang="en-US" sz="1500"/>
           </a:p>
-          <a:p>
-            <a:pPr marL="0" indent="0">
-              <a:lnSpc>
-                <a:spcPts val="1950"/>
-              </a:lnSpc>
-              <a:spcAft>
-                <a:spcPts val="0"/>
-              </a:spcAft>
-              <a:buNone/>
-            </a:pPr>
-            <a:r>
-              <a:rPr lang="en-US" sz="1500" b="0">
-                <a:solidFill>
-                  <a:srgbClr val="202B33"/>
-                </a:solidFill>
-                <a:latin typeface="Arial"/>
-                <a:ea typeface="Arial"/>
-                <a:cs typeface="Arial"/>
-              </a:rPr>
-              <a:t xml:space="preserve">we model using them, how we design group</a:t>
-            </a:r>
-            <a:endParaRPr lang="en-US" sz="1500"/>
-          </a:p>
-          <a:p>
-            <a:pPr marL="0" indent="0">
-              <a:lnSpc>
-                <a:spcPts val="1950"/>
-              </a:lnSpc>
-              <a:spcAft>
-                <a:spcPts val="0"/>
-              </a:spcAft>
-              <a:buNone/>
-            </a:pPr>
-            <a:r>
-              <a:rPr lang="en-US" sz="1500" b="0">
-                <a:solidFill>
-                  <a:srgbClr val="202B33"/>
-                </a:solidFill>
-                <a:latin typeface="Arial"/>
-                <a:ea typeface="Arial"/>
-                <a:cs typeface="Arial"/>
-              </a:rPr>
-              <a:t xml:space="preserve">work around them.</a:t>
-            </a:r>
-            <a:endParaRPr lang="en-US" sz="1500"/>
-          </a:p>
-          <a:p>
-            <a:pPr marL="0" indent="0">
-              <a:lnSpc>
-                <a:spcPts val="1950"/>
-              </a:lnSpc>
-              <a:spcAft>
-                <a:spcPts val="0"/>
-              </a:spcAft>
-              <a:buNone/>
-            </a:pPr>
-            <a:r>
-              <a:rPr lang="en-US" sz="1500" b="0">
-                <a:solidFill>
-                  <a:srgbClr val="202B33"/>
-                </a:solidFill>
-                <a:latin typeface="Arial"/>
-                <a:ea typeface="Arial"/>
-                <a:cs typeface="Arial"/>
-              </a:rPr>
-              <a:t xml:space="preserve"/>
-            </a:r>
-            <a:endParaRPr lang="en-US" sz="1500"/>
-          </a:p>
-          <a:p>
-            <a:pPr marL="0" indent="0">
-              <a:lnSpc>
-                <a:spcPts val="1950"/>
-              </a:lnSpc>
-              <a:spcAft>
-                <a:spcPts val="0"/>
-              </a:spcAft>
-              <a:buNone/>
-            </a:pPr>
-            <a:r>
-              <a:rPr lang="en-US" sz="1500" b="0">
-                <a:solidFill>
-                  <a:srgbClr val="202B33"/>
-                </a:solidFill>
-                <a:latin typeface="Arial"/>
-                <a:ea typeface="Arial"/>
-                <a:cs typeface="Arial"/>
-              </a:rPr>
-              <a:t xml:space="preserve">The kid next to the Casio owner didn't need</a:t>
-            </a:r>
-            <a:endParaRPr lang="en-US" sz="1500"/>
-          </a:p>
         </p:txBody>
       </p:sp>
       <p:sp>
@@ -12466,99 +12420,30 @@
                 <a:ea typeface="Arial"/>
                 <a:cs typeface="Arial"/>
               </a:rPr>
-              <a:t xml:space="preserve">a watch. The kid with no car never touched</a:t>
-            </a:r>
-            <a:endParaRPr lang="en-US" sz="1500"/>
-          </a:p>
-          <a:p>
-            <a:pPr marL="0" indent="0">
-              <a:lnSpc>
-                <a:spcPts val="1950"/>
-              </a:lnSpc>
-              <a:spcAft>
-                <a:spcPts val="0"/>
-              </a:spcAft>
-              <a:buNone/>
-            </a:pPr>
-            <a:r>
-              <a:rPr lang="en-US" sz="1500" b="0">
-                <a:solidFill>
-                  <a:srgbClr val="202B33"/>
-                </a:solidFill>
-                <a:latin typeface="Arial"/>
-                <a:ea typeface="Arial"/>
-                <a:cs typeface="Arial"/>
-              </a:rPr>
-              <a:t xml:space="preserve">the clay. The same tool that lets Johnny</a:t>
-            </a:r>
-            <a:endParaRPr lang="en-US" sz="1500"/>
-          </a:p>
-          <a:p>
-            <a:pPr marL="0" indent="0">
-              <a:lnSpc>
-                <a:spcPts val="1950"/>
-              </a:lnSpc>
-              <a:spcAft>
-                <a:spcPts val="0"/>
-              </a:spcAft>
-              <a:buNone/>
-            </a:pPr>
-            <a:r>
-              <a:rPr lang="en-US" sz="1500" b="0">
-                <a:solidFill>
-                  <a:srgbClr val="202B33"/>
-                </a:solidFill>
-                <a:latin typeface="Arial"/>
-                <a:ea typeface="Arial"/>
-                <a:cs typeface="Arial"/>
-              </a:rPr>
-              <a:t xml:space="preserve">phone it in is the one that can hand a</a:t>
-            </a:r>
-            <a:endParaRPr lang="en-US" sz="1500"/>
-          </a:p>
-          <a:p>
-            <a:pPr marL="0" indent="0">
-              <a:lnSpc>
-                <a:spcPts val="1950"/>
-              </a:lnSpc>
-              <a:spcAft>
-                <a:spcPts val="0"/>
-              </a:spcAft>
-              <a:buNone/>
-            </a:pPr>
-            <a:r>
-              <a:rPr lang="en-US" sz="1500" b="0">
-                <a:solidFill>
-                  <a:srgbClr val="202B33"/>
-                </a:solidFill>
-                <a:latin typeface="Arial"/>
-                <a:ea typeface="Arial"/>
-                <a:cs typeface="Arial"/>
-              </a:rPr>
-              <a:t xml:space="preserve">sculptor the clay. Which one happens is a</a:t>
-            </a:r>
-            <a:endParaRPr lang="en-US" sz="1500"/>
-          </a:p>
-          <a:p>
-            <a:pPr marL="0" indent="0">
-              <a:lnSpc>
-                <a:spcPts val="1950"/>
-              </a:lnSpc>
-              <a:spcAft>
-                <a:spcPts val="0"/>
-              </a:spcAft>
-              <a:buNone/>
-            </a:pPr>
-            <a:r>
-              <a:rPr lang="en-US" sz="1500" b="0">
-                <a:solidFill>
-                  <a:srgbClr val="202B33"/>
-                </a:solidFill>
-                <a:latin typeface="Arial"/>
-                <a:ea typeface="Arial"/>
-                <a:cs typeface="Arial"/>
-              </a:rPr>
-              <a:t xml:space="preserve">design decision, and it's ours.</a:t>
+              <a:t xml:space="preserve">we model using them, how we design group</a:t>
+            </a:r>
+            <a:endParaRPr lang="en-US" sz="1500"/>
+          </a:p>
+          <a:p>
+            <a:pPr marL="0" indent="0">
+              <a:lnSpc>
+                <a:spcPts val="1950"/>
+              </a:lnSpc>
+              <a:spcAft>
+                <a:spcPts val="0"/>
+              </a:spcAft>
+              <a:buNone/>
+            </a:pPr>
+            <a:r>
+              <a:rPr lang="en-US" sz="1500" b="0">
+                <a:solidFill>
+                  <a:srgbClr val="202B33"/>
+                </a:solidFill>
+                <a:latin typeface="Arial"/>
+                <a:ea typeface="Arial"/>
+                <a:cs typeface="Arial"/>
+              </a:rPr>
+              <a:t xml:space="preserve">work around them.</a:t>
             </a:r>
             <a:endParaRPr lang="en-US" sz="1500"/>
           </a:p>

--- a/artifacts/speaking-portfolio-expanded/decks/evidence-learning-15min-handout.pptx
+++ b/artifacts/speaking-portfolio-expanded/decks/evidence-learning-15min-handout.pptx
@@ -558,7 +558,7 @@
                 <a:ea typeface="Arial"/>
                 <a:cs typeface="Arial"/>
               </a:rPr>
-              <a:t xml:space="preserve">Source slide 1. 00:00 to 01:30</a:t>
+              <a:t xml:space="preserve">Source slide 1. 00:00 to 01:00</a:t>
             </a:r>
             <a:endParaRPr lang="en-US" sz="1200"/>
           </a:p>
@@ -743,52 +743,6 @@
                 <a:cs typeface="Arial"/>
               </a:rPr>
               <a:t xml:space="preserve">Confession: I may have used one or two on an assessment. But we're not here for that. What I did was wholesome. These kids are phoning it in. Not even trying. Infuriating, right?</a:t>
-            </a:r>
-            <a:endParaRPr lang="en-US" sz="1200"/>
-          </a:p>
-          <a:p>
-            <a:pPr marL="0" indent="0">
-              <a:lnSpc>
-                <a:spcPts val="1560"/>
-              </a:lnSpc>
-              <a:spcAft>
-                <a:spcPts val="0"/>
-              </a:spcAft>
-              <a:buNone/>
-            </a:pPr>
-            <a:r>
-              <a:rPr lang="en-US" sz="1200" b="0">
-                <a:solidFill>
-                  <a:srgbClr val="202b33"/>
-                </a:solidFill>
-                <a:latin typeface="Arial"/>
-                <a:ea typeface="Arial"/>
-                <a:cs typeface="Arial"/>
-              </a:rPr>
-              <a:t xml:space="preserve"/>
-            </a:r>
-            <a:endParaRPr lang="en-US" sz="1200"/>
-          </a:p>
-          <a:p>
-            <a:pPr marL="0" indent="0">
-              <a:lnSpc>
-                <a:spcPts val="1560"/>
-              </a:lnSpc>
-              <a:spcAft>
-                <a:spcPts val="0"/>
-              </a:spcAft>
-              <a:buNone/>
-            </a:pPr>
-            <a:r>
-              <a:rPr lang="en-US" sz="1200" b="0">
-                <a:solidFill>
-                  <a:srgbClr val="202b33"/>
-                </a:solidFill>
-                <a:latin typeface="Arial"/>
-                <a:ea typeface="Arial"/>
-                <a:cs typeface="Arial"/>
-              </a:rPr>
-              <a:t xml:space="preserve">Our calculator-clutching ancestors had to write a real trajectory into the curriculum. So do we. Everything today is authored fixtures, a rubric I'm proposing, and one exercise that shows evidence being collected. Here's the plan: what we stop doing, what we protect, what we teach, and three ways to actually outsmart them.</a:t>
             </a:r>
             <a:endParaRPr lang="en-US" sz="1200"/>
           </a:p>
@@ -1039,7 +993,7 @@
                 <a:ea typeface="Arial"/>
                 <a:cs typeface="Arial"/>
               </a:rPr>
-              <a:t xml:space="preserve">Source slide 2. 01:30 to 03:00</a:t>
+              <a:t xml:space="preserve">Source slide 2. 01:00 to 03:00</a:t>
             </a:r>
             <a:endParaRPr lang="en-US" sz="1200"/>
           </a:p>
@@ -1566,7 +1520,7 @@
                 <a:ea typeface="Arial"/>
                 <a:cs typeface="Arial"/>
               </a:rPr>
-              <a:t xml:space="preserve">Source slide 4. 03:00 to 04:00</a:t>
+              <a:t xml:space="preserve">Source slide 4. 03:00 to 04:15</a:t>
             </a:r>
             <a:endParaRPr lang="en-US" sz="1200"/>
           </a:p>
@@ -2001,7 +1955,7 @@
                 <a:ea typeface="Arial"/>
                 <a:cs typeface="Arial"/>
               </a:rPr>
-              <a:t xml:space="preserve">Source slide 5. 04:00 to 06:00</a:t>
+              <a:t xml:space="preserve">Source slide 5. 04:15 to 06:15</a:t>
             </a:r>
             <a:endParaRPr lang="en-US" sz="1200"/>
           </a:p>
@@ -2232,52 +2186,6 @@
                 <a:cs typeface="Arial"/>
               </a:rPr>
               <a:t xml:space="preserve">That one experience beats every ban, filter and lockdown. Hand the prompt out like a worksheet: "paste these instructions as your first message." Expect a recorded screen or an exported session. Older students get to experiment as the objective itself: the writing challenge, the rhyming challenge, whatever riddles the English teachers love. The constraint that keeps it honest is personalization. Narrate it from summer camp. Reference this week's unit. Meet a criterion the model can't know.</a:t>
-            </a:r>
-            <a:endParaRPr lang="en-US" sz="1200"/>
-          </a:p>
-          <a:p>
-            <a:pPr marL="0" indent="0">
-              <a:lnSpc>
-                <a:spcPts val="1560"/>
-              </a:lnSpc>
-              <a:spcAft>
-                <a:spcPts val="0"/>
-              </a:spcAft>
-              <a:buNone/>
-            </a:pPr>
-            <a:r>
-              <a:rPr lang="en-US" sz="1200" b="0">
-                <a:solidFill>
-                  <a:srgbClr val="202b33"/>
-                </a:solidFill>
-                <a:latin typeface="Arial"/>
-                <a:ea typeface="Arial"/>
-                <a:cs typeface="Arial"/>
-              </a:rPr>
-              <a:t xml:space="preserve"/>
-            </a:r>
-            <a:endParaRPr lang="en-US" sz="1200"/>
-          </a:p>
-          <a:p>
-            <a:pPr marL="0" indent="0">
-              <a:lnSpc>
-                <a:spcPts val="1560"/>
-              </a:lnSpc>
-              <a:spcAft>
-                <a:spcPts val="0"/>
-              </a:spcAft>
-              <a:buNone/>
-            </a:pPr>
-            <a:r>
-              <a:rPr lang="en-US" sz="1200" b="0">
-                <a:solidFill>
-                  <a:srgbClr val="202b33"/>
-                </a:solidFill>
-                <a:latin typeface="Arial"/>
-                <a:ea typeface="Arial"/>
-                <a:cs typeface="Arial"/>
-              </a:rPr>
-              <a:t xml:space="preserve">Privacy rides along for free. If you share Lake Tahoe, maybe not the photo of your grandparents' place on the water that any model can geolocate. Nobody is teaching students how these systems actually work. This assignment does.</a:t>
             </a:r>
             <a:endParaRPr lang="en-US" sz="1200"/>
           </a:p>
@@ -2528,7 +2436,7 @@
                 <a:ea typeface="Arial"/>
                 <a:cs typeface="Arial"/>
               </a:rPr>
-              <a:t xml:space="preserve">Source slide 7. 06:00 to 09:00</a:t>
+              <a:t xml:space="preserve">Source slide 7. 06:15 to 09:15</a:t>
             </a:r>
             <a:endParaRPr lang="en-US" sz="1200"/>
           </a:p>
@@ -2963,7 +2871,7 @@
                 <a:ea typeface="Arial"/>
                 <a:cs typeface="Arial"/>
               </a:rPr>
-              <a:t xml:space="preserve">Source slide 8. 09:00 to 11:00</a:t>
+              <a:t xml:space="preserve">Source slide 8. 09:15 to 10:45</a:t>
             </a:r>
             <a:endParaRPr lang="en-US" sz="1200"/>
           </a:p>
@@ -3536,7 +3444,7 @@
                 <a:ea typeface="Arial"/>
                 <a:cs typeface="Arial"/>
               </a:rPr>
-              <a:t xml:space="preserve">Source slide 9. 11:00 to 13:30</a:t>
+              <a:t xml:space="preserve">Source slide 9. 10:45 to 13:15</a:t>
             </a:r>
             <a:endParaRPr lang="en-US" sz="1200"/>
           </a:p>
@@ -3721,52 +3629,6 @@
                 <a:cs typeface="Arial"/>
               </a:rPr>
               <a:t xml:space="preserve">Answering from memory and reading a model's output aloud produce different mistakes. The reader falls behind as the text wraps and jumps. They mispronounce a word they'd never have chosen. Spoken language carries enough tells to sort likely from unlikely.</a:t>
-            </a:r>
-            <a:endParaRPr lang="en-US" sz="1200"/>
-          </a:p>
-          <a:p>
-            <a:pPr marL="0" indent="0">
-              <a:lnSpc>
-                <a:spcPts val="1560"/>
-              </a:lnSpc>
-              <a:spcAft>
-                <a:spcPts val="0"/>
-              </a:spcAft>
-              <a:buNone/>
-            </a:pPr>
-            <a:r>
-              <a:rPr lang="en-US" sz="1200" b="0">
-                <a:solidFill>
-                  <a:srgbClr val="202b33"/>
-                </a:solidFill>
-                <a:latin typeface="Arial"/>
-                <a:ea typeface="Arial"/>
-                <a:cs typeface="Arial"/>
-              </a:rPr>
-              <a:t xml:space="preserve"/>
-            </a:r>
-            <a:endParaRPr lang="en-US" sz="1200"/>
-          </a:p>
-          <a:p>
-            <a:pPr marL="0" indent="0">
-              <a:lnSpc>
-                <a:spcPts val="1560"/>
-              </a:lnSpc>
-              <a:spcAft>
-                <a:spcPts val="0"/>
-              </a:spcAft>
-              <a:buNone/>
-            </a:pPr>
-            <a:r>
-              <a:rPr lang="en-US" sz="1200" b="0">
-                <a:solidFill>
-                  <a:srgbClr val="202b33"/>
-                </a:solidFill>
-                <a:latin typeface="Arial"/>
-                <a:ea typeface="Arial"/>
-                <a:cs typeface="Arial"/>
-              </a:rPr>
-              <a:t xml:space="preserve">Small groups, speaking, in class: that resets the table. It adds social pressure against cheating and hands you knobs on an incentive structure that today is a magical cheating genie. Not foolproof. A student can build an agent told to seem dumb at first and then learn. Fine. We're changing incentives, not buying certainty.</a:t>
             </a:r>
             <a:endParaRPr lang="en-US" sz="1200"/>
           </a:p>
@@ -4063,7 +3925,7 @@
                 <a:ea typeface="Arial"/>
                 <a:cs typeface="Arial"/>
               </a:rPr>
-              <a:t xml:space="preserve">Source slide 14. 13:30 to 15:00</a:t>
+              <a:t xml:space="preserve">Source slide 14. 13:15 to 15:00</a:t>
             </a:r>
             <a:endParaRPr lang="en-US" sz="1200"/>
           </a:p>
@@ -5854,121 +5716,6 @@
             </a:r>
             <a:endParaRPr lang="en-US" sz="1500"/>
           </a:p>
-          <a:p>
-            <a:pPr marL="0" indent="0">
-              <a:lnSpc>
-                <a:spcPts val="1950"/>
-              </a:lnSpc>
-              <a:spcAft>
-                <a:spcPts val="0"/>
-              </a:spcAft>
-              <a:buNone/>
-            </a:pPr>
-            <a:r>
-              <a:rPr lang="en-US" sz="1500" b="0">
-                <a:solidFill>
-                  <a:srgbClr val="202B33"/>
-                </a:solidFill>
-                <a:latin typeface="Arial"/>
-                <a:ea typeface="Arial"/>
-                <a:cs typeface="Arial"/>
-              </a:rPr>
-              <a:t xml:space="preserve">next to the Casio owner didn't even need</a:t>
-            </a:r>
-            <a:endParaRPr lang="en-US" sz="1500"/>
-          </a:p>
-          <a:p>
-            <a:pPr marL="0" indent="0">
-              <a:lnSpc>
-                <a:spcPts val="1950"/>
-              </a:lnSpc>
-              <a:spcAft>
-                <a:spcPts val="0"/>
-              </a:spcAft>
-              <a:buNone/>
-            </a:pPr>
-            <a:r>
-              <a:rPr lang="en-US" sz="1500" b="0">
-                <a:solidFill>
-                  <a:srgbClr val="202B33"/>
-                </a:solidFill>
-                <a:latin typeface="Arial"/>
-                <a:ea typeface="Arial"/>
-                <a:cs typeface="Arial"/>
-              </a:rPr>
-              <a:t xml:space="preserve">one.</a:t>
-            </a:r>
-            <a:endParaRPr lang="en-US" sz="1500"/>
-          </a:p>
-          <a:p>
-            <a:pPr marL="0" indent="0">
-              <a:lnSpc>
-                <a:spcPts val="1950"/>
-              </a:lnSpc>
-              <a:spcAft>
-                <a:spcPts val="0"/>
-              </a:spcAft>
-              <a:buNone/>
-            </a:pPr>
-            <a:r>
-              <a:rPr lang="en-US" sz="1500" b="0">
-                <a:solidFill>
-                  <a:srgbClr val="202B33"/>
-                </a:solidFill>
-                <a:latin typeface="Arial"/>
-                <a:ea typeface="Arial"/>
-                <a:cs typeface="Arial"/>
-              </a:rPr>
-              <a:t xml:space="preserve"/>
-            </a:r>
-            <a:endParaRPr lang="en-US" sz="1500"/>
-          </a:p>
-          <a:p>
-            <a:pPr marL="0" indent="0">
-              <a:lnSpc>
-                <a:spcPts val="1950"/>
-              </a:lnSpc>
-              <a:spcAft>
-                <a:spcPts val="0"/>
-              </a:spcAft>
-              <a:buNone/>
-            </a:pPr>
-            <a:r>
-              <a:rPr lang="en-US" sz="1500" b="0">
-                <a:solidFill>
-                  <a:srgbClr val="202B33"/>
-                </a:solidFill>
-                <a:latin typeface="Arial"/>
-                <a:ea typeface="Arial"/>
-                <a:cs typeface="Arial"/>
-              </a:rPr>
-              <a:t xml:space="preserve">Confession: I may have used one or two on</a:t>
-            </a:r>
-            <a:endParaRPr lang="en-US" sz="1500"/>
-          </a:p>
-          <a:p>
-            <a:pPr marL="0" indent="0">
-              <a:lnSpc>
-                <a:spcPts val="1950"/>
-              </a:lnSpc>
-              <a:spcAft>
-                <a:spcPts val="0"/>
-              </a:spcAft>
-              <a:buNone/>
-            </a:pPr>
-            <a:r>
-              <a:rPr lang="en-US" sz="1500" b="0">
-                <a:solidFill>
-                  <a:srgbClr val="202B33"/>
-                </a:solidFill>
-                <a:latin typeface="Arial"/>
-                <a:ea typeface="Arial"/>
-                <a:cs typeface="Arial"/>
-              </a:rPr>
-              <a:t xml:space="preserve">an assessment. But we're not here for that.</a:t>
-            </a:r>
-            <a:endParaRPr lang="en-US" sz="1500"/>
-          </a:p>
         </p:txBody>
       </p:sp>
       <p:sp>
@@ -6014,6 +5761,121 @@
                 <a:ea typeface="Arial"/>
                 <a:cs typeface="Arial"/>
               </a:rPr>
+              <a:t xml:space="preserve">next to the Casio owner didn't even need</a:t>
+            </a:r>
+            <a:endParaRPr lang="en-US" sz="1500"/>
+          </a:p>
+          <a:p>
+            <a:pPr marL="0" indent="0">
+              <a:lnSpc>
+                <a:spcPts val="1950"/>
+              </a:lnSpc>
+              <a:spcAft>
+                <a:spcPts val="0"/>
+              </a:spcAft>
+              <a:buNone/>
+            </a:pPr>
+            <a:r>
+              <a:rPr lang="en-US" sz="1500" b="0">
+                <a:solidFill>
+                  <a:srgbClr val="202B33"/>
+                </a:solidFill>
+                <a:latin typeface="Arial"/>
+                <a:ea typeface="Arial"/>
+                <a:cs typeface="Arial"/>
+              </a:rPr>
+              <a:t xml:space="preserve">one.</a:t>
+            </a:r>
+            <a:endParaRPr lang="en-US" sz="1500"/>
+          </a:p>
+          <a:p>
+            <a:pPr marL="0" indent="0">
+              <a:lnSpc>
+                <a:spcPts val="1950"/>
+              </a:lnSpc>
+              <a:spcAft>
+                <a:spcPts val="0"/>
+              </a:spcAft>
+              <a:buNone/>
+            </a:pPr>
+            <a:r>
+              <a:rPr lang="en-US" sz="1500" b="0">
+                <a:solidFill>
+                  <a:srgbClr val="202B33"/>
+                </a:solidFill>
+                <a:latin typeface="Arial"/>
+                <a:ea typeface="Arial"/>
+                <a:cs typeface="Arial"/>
+              </a:rPr>
+              <a:t xml:space="preserve"/>
+            </a:r>
+            <a:endParaRPr lang="en-US" sz="1500"/>
+          </a:p>
+          <a:p>
+            <a:pPr marL="0" indent="0">
+              <a:lnSpc>
+                <a:spcPts val="1950"/>
+              </a:lnSpc>
+              <a:spcAft>
+                <a:spcPts val="0"/>
+              </a:spcAft>
+              <a:buNone/>
+            </a:pPr>
+            <a:r>
+              <a:rPr lang="en-US" sz="1500" b="0">
+                <a:solidFill>
+                  <a:srgbClr val="202B33"/>
+                </a:solidFill>
+                <a:latin typeface="Arial"/>
+                <a:ea typeface="Arial"/>
+                <a:cs typeface="Arial"/>
+              </a:rPr>
+              <a:t xml:space="preserve">Confession: I may have used one or two on</a:t>
+            </a:r>
+            <a:endParaRPr lang="en-US" sz="1500"/>
+          </a:p>
+          <a:p>
+            <a:pPr marL="0" indent="0">
+              <a:lnSpc>
+                <a:spcPts val="1950"/>
+              </a:lnSpc>
+              <a:spcAft>
+                <a:spcPts val="0"/>
+              </a:spcAft>
+              <a:buNone/>
+            </a:pPr>
+            <a:r>
+              <a:rPr lang="en-US" sz="1500" b="0">
+                <a:solidFill>
+                  <a:srgbClr val="202B33"/>
+                </a:solidFill>
+                <a:latin typeface="Arial"/>
+                <a:ea typeface="Arial"/>
+                <a:cs typeface="Arial"/>
+              </a:rPr>
+              <a:t xml:space="preserve">an assessment. But we're not here for that.</a:t>
+            </a:r>
+            <a:endParaRPr lang="en-US" sz="1500"/>
+          </a:p>
+          <a:p>
+            <a:pPr marL="0" indent="0">
+              <a:lnSpc>
+                <a:spcPts val="1950"/>
+              </a:lnSpc>
+              <a:spcAft>
+                <a:spcPts val="0"/>
+              </a:spcAft>
+              <a:buNone/>
+            </a:pPr>
+            <a:r>
+              <a:rPr lang="en-US" sz="1500" b="0">
+                <a:solidFill>
+                  <a:srgbClr val="202B33"/>
+                </a:solidFill>
+                <a:latin typeface="Arial"/>
+                <a:ea typeface="Arial"/>
+                <a:cs typeface="Arial"/>
+              </a:rPr>
               <a:t xml:space="preserve">What I did was wholesome. These kids are</a:t>
             </a:r>
             <a:endParaRPr lang="en-US" sz="1500"/>
@@ -6061,213 +5923,6 @@
                 <a:cs typeface="Arial"/>
               </a:rPr>
               <a:t xml:space="preserve">Infuriating, right?</a:t>
-            </a:r>
-            <a:endParaRPr lang="en-US" sz="1500"/>
-          </a:p>
-          <a:p>
-            <a:pPr marL="0" indent="0">
-              <a:lnSpc>
-                <a:spcPts val="1950"/>
-              </a:lnSpc>
-              <a:spcAft>
-                <a:spcPts val="0"/>
-              </a:spcAft>
-              <a:buNone/>
-            </a:pPr>
-            <a:r>
-              <a:rPr lang="en-US" sz="1500" b="0">
-                <a:solidFill>
-                  <a:srgbClr val="202B33"/>
-                </a:solidFill>
-                <a:latin typeface="Arial"/>
-                <a:ea typeface="Arial"/>
-                <a:cs typeface="Arial"/>
-              </a:rPr>
-              <a:t xml:space="preserve"/>
-            </a:r>
-            <a:endParaRPr lang="en-US" sz="1500"/>
-          </a:p>
-          <a:p>
-            <a:pPr marL="0" indent="0">
-              <a:lnSpc>
-                <a:spcPts val="1950"/>
-              </a:lnSpc>
-              <a:spcAft>
-                <a:spcPts val="0"/>
-              </a:spcAft>
-              <a:buNone/>
-            </a:pPr>
-            <a:r>
-              <a:rPr lang="en-US" sz="1500" b="0">
-                <a:solidFill>
-                  <a:srgbClr val="202B33"/>
-                </a:solidFill>
-                <a:latin typeface="Arial"/>
-                <a:ea typeface="Arial"/>
-                <a:cs typeface="Arial"/>
-              </a:rPr>
-              <a:t xml:space="preserve">Our calculator-clutching ancestors had to</a:t>
-            </a:r>
-            <a:endParaRPr lang="en-US" sz="1500"/>
-          </a:p>
-          <a:p>
-            <a:pPr marL="0" indent="0">
-              <a:lnSpc>
-                <a:spcPts val="1950"/>
-              </a:lnSpc>
-              <a:spcAft>
-                <a:spcPts val="0"/>
-              </a:spcAft>
-              <a:buNone/>
-            </a:pPr>
-            <a:r>
-              <a:rPr lang="en-US" sz="1500" b="0">
-                <a:solidFill>
-                  <a:srgbClr val="202B33"/>
-                </a:solidFill>
-                <a:latin typeface="Arial"/>
-                <a:ea typeface="Arial"/>
-                <a:cs typeface="Arial"/>
-              </a:rPr>
-              <a:t xml:space="preserve">write a real trajectory into the</a:t>
-            </a:r>
-            <a:endParaRPr lang="en-US" sz="1500"/>
-          </a:p>
-          <a:p>
-            <a:pPr marL="0" indent="0">
-              <a:lnSpc>
-                <a:spcPts val="1950"/>
-              </a:lnSpc>
-              <a:spcAft>
-                <a:spcPts val="0"/>
-              </a:spcAft>
-              <a:buNone/>
-            </a:pPr>
-            <a:r>
-              <a:rPr lang="en-US" sz="1500" b="0">
-                <a:solidFill>
-                  <a:srgbClr val="202B33"/>
-                </a:solidFill>
-                <a:latin typeface="Arial"/>
-                <a:ea typeface="Arial"/>
-                <a:cs typeface="Arial"/>
-              </a:rPr>
-              <a:t xml:space="preserve">curriculum. So do we. Everything today is</a:t>
-            </a:r>
-            <a:endParaRPr lang="en-US" sz="1500"/>
-          </a:p>
-          <a:p>
-            <a:pPr marL="0" indent="0">
-              <a:lnSpc>
-                <a:spcPts val="1950"/>
-              </a:lnSpc>
-              <a:spcAft>
-                <a:spcPts val="0"/>
-              </a:spcAft>
-              <a:buNone/>
-            </a:pPr>
-            <a:r>
-              <a:rPr lang="en-US" sz="1500" b="0">
-                <a:solidFill>
-                  <a:srgbClr val="202B33"/>
-                </a:solidFill>
-                <a:latin typeface="Arial"/>
-                <a:ea typeface="Arial"/>
-                <a:cs typeface="Arial"/>
-              </a:rPr>
-              <a:t xml:space="preserve">authored fixtures, a rubric I'm proposing,</a:t>
-            </a:r>
-            <a:endParaRPr lang="en-US" sz="1500"/>
-          </a:p>
-          <a:p>
-            <a:pPr marL="0" indent="0">
-              <a:lnSpc>
-                <a:spcPts val="1950"/>
-              </a:lnSpc>
-              <a:spcAft>
-                <a:spcPts val="0"/>
-              </a:spcAft>
-              <a:buNone/>
-            </a:pPr>
-            <a:r>
-              <a:rPr lang="en-US" sz="1500" b="0">
-                <a:solidFill>
-                  <a:srgbClr val="202B33"/>
-                </a:solidFill>
-                <a:latin typeface="Arial"/>
-                <a:ea typeface="Arial"/>
-                <a:cs typeface="Arial"/>
-              </a:rPr>
-              <a:t xml:space="preserve">and one exercise that shows evidence being</a:t>
-            </a:r>
-            <a:endParaRPr lang="en-US" sz="1500"/>
-          </a:p>
-          <a:p>
-            <a:pPr marL="0" indent="0">
-              <a:lnSpc>
-                <a:spcPts val="1950"/>
-              </a:lnSpc>
-              <a:spcAft>
-                <a:spcPts val="0"/>
-              </a:spcAft>
-              <a:buNone/>
-            </a:pPr>
-            <a:r>
-              <a:rPr lang="en-US" sz="1500" b="0">
-                <a:solidFill>
-                  <a:srgbClr val="202B33"/>
-                </a:solidFill>
-                <a:latin typeface="Arial"/>
-                <a:ea typeface="Arial"/>
-                <a:cs typeface="Arial"/>
-              </a:rPr>
-              <a:t xml:space="preserve">collected. Here's the plan: what we stop</a:t>
-            </a:r>
-            <a:endParaRPr lang="en-US" sz="1500"/>
-          </a:p>
-          <a:p>
-            <a:pPr marL="0" indent="0">
-              <a:lnSpc>
-                <a:spcPts val="1950"/>
-              </a:lnSpc>
-              <a:spcAft>
-                <a:spcPts val="0"/>
-              </a:spcAft>
-              <a:buNone/>
-            </a:pPr>
-            <a:r>
-              <a:rPr lang="en-US" sz="1500" b="0">
-                <a:solidFill>
-                  <a:srgbClr val="202B33"/>
-                </a:solidFill>
-                <a:latin typeface="Arial"/>
-                <a:ea typeface="Arial"/>
-                <a:cs typeface="Arial"/>
-              </a:rPr>
-              <a:t xml:space="preserve">doing, what we protect, what we teach, and</a:t>
-            </a:r>
-            <a:endParaRPr lang="en-US" sz="1500"/>
-          </a:p>
-          <a:p>
-            <a:pPr marL="0" indent="0">
-              <a:lnSpc>
-                <a:spcPts val="1950"/>
-              </a:lnSpc>
-              <a:spcAft>
-                <a:spcPts val="0"/>
-              </a:spcAft>
-              <a:buNone/>
-            </a:pPr>
-            <a:r>
-              <a:rPr lang="en-US" sz="1500" b="0">
-                <a:solidFill>
-                  <a:srgbClr val="202B33"/>
-                </a:solidFill>
-                <a:latin typeface="Arial"/>
-                <a:ea typeface="Arial"/>
-                <a:cs typeface="Arial"/>
-              </a:rPr>
-              <a:t xml:space="preserve">three ways to actually outsmart them.</a:t>
             </a:r>
             <a:endParaRPr lang="en-US" sz="1500"/>
           </a:p>
@@ -8491,75 +8146,6 @@
             </a:r>
             <a:endParaRPr lang="en-US" sz="1500"/>
           </a:p>
-          <a:p>
-            <a:pPr marL="0" indent="0">
-              <a:lnSpc>
-                <a:spcPts val="1950"/>
-              </a:lnSpc>
-              <a:spcAft>
-                <a:spcPts val="0"/>
-              </a:spcAft>
-              <a:buNone/>
-            </a:pPr>
-            <a:r>
-              <a:rPr lang="en-US" sz="1500" b="0">
-                <a:solidFill>
-                  <a:srgbClr val="202B33"/>
-                </a:solidFill>
-                <a:latin typeface="Arial"/>
-                <a:ea typeface="Arial"/>
-                <a:cs typeface="Arial"/>
-              </a:rPr>
-              <a:t xml:space="preserve">teaches itself. You were supposed to check.</a:t>
-            </a:r>
-            <a:endParaRPr lang="en-US" sz="1500"/>
-          </a:p>
-          <a:p>
-            <a:pPr marL="0" indent="0">
-              <a:lnSpc>
-                <a:spcPts val="1950"/>
-              </a:lnSpc>
-              <a:spcAft>
-                <a:spcPts val="0"/>
-              </a:spcAft>
-              <a:buNone/>
-            </a:pPr>
-            <a:r>
-              <a:rPr lang="en-US" sz="1500" b="0">
-                <a:solidFill>
-                  <a:srgbClr val="202B33"/>
-                </a:solidFill>
-                <a:latin typeface="Arial"/>
-                <a:ea typeface="Arial"/>
-                <a:cs typeface="Arial"/>
-              </a:rPr>
-              <a:t xml:space="preserve"/>
-            </a:r>
-            <a:endParaRPr lang="en-US" sz="1500"/>
-          </a:p>
-          <a:p>
-            <a:pPr marL="0" indent="0">
-              <a:lnSpc>
-                <a:spcPts val="1950"/>
-              </a:lnSpc>
-              <a:spcAft>
-                <a:spcPts val="0"/>
-              </a:spcAft>
-              <a:buNone/>
-            </a:pPr>
-            <a:r>
-              <a:rPr lang="en-US" sz="1500" b="0">
-                <a:solidFill>
-                  <a:srgbClr val="202B33"/>
-                </a:solidFill>
-                <a:latin typeface="Arial"/>
-                <a:ea typeface="Arial"/>
-                <a:cs typeface="Arial"/>
-              </a:rPr>
-              <a:t xml:space="preserve">That one experience beats every ban, filter</a:t>
-            </a:r>
-            <a:endParaRPr lang="en-US" sz="1500"/>
-          </a:p>
         </p:txBody>
       </p:sp>
       <p:sp>
@@ -8605,6 +8191,75 @@
                 <a:ea typeface="Arial"/>
                 <a:cs typeface="Arial"/>
               </a:rPr>
+              <a:t xml:space="preserve">teaches itself. You were supposed to check.</a:t>
+            </a:r>
+            <a:endParaRPr lang="en-US" sz="1500"/>
+          </a:p>
+          <a:p>
+            <a:pPr marL="0" indent="0">
+              <a:lnSpc>
+                <a:spcPts val="1950"/>
+              </a:lnSpc>
+              <a:spcAft>
+                <a:spcPts val="0"/>
+              </a:spcAft>
+              <a:buNone/>
+            </a:pPr>
+            <a:r>
+              <a:rPr lang="en-US" sz="1500" b="0">
+                <a:solidFill>
+                  <a:srgbClr val="202B33"/>
+                </a:solidFill>
+                <a:latin typeface="Arial"/>
+                <a:ea typeface="Arial"/>
+                <a:cs typeface="Arial"/>
+              </a:rPr>
+              <a:t xml:space="preserve"/>
+            </a:r>
+            <a:endParaRPr lang="en-US" sz="1500"/>
+          </a:p>
+          <a:p>
+            <a:pPr marL="0" indent="0">
+              <a:lnSpc>
+                <a:spcPts val="1950"/>
+              </a:lnSpc>
+              <a:spcAft>
+                <a:spcPts val="0"/>
+              </a:spcAft>
+              <a:buNone/>
+            </a:pPr>
+            <a:r>
+              <a:rPr lang="en-US" sz="1500" b="0">
+                <a:solidFill>
+                  <a:srgbClr val="202B33"/>
+                </a:solidFill>
+                <a:latin typeface="Arial"/>
+                <a:ea typeface="Arial"/>
+                <a:cs typeface="Arial"/>
+              </a:rPr>
+              <a:t xml:space="preserve">That one experience beats every ban, filter</a:t>
+            </a:r>
+            <a:endParaRPr lang="en-US" sz="1500"/>
+          </a:p>
+          <a:p>
+            <a:pPr marL="0" indent="0">
+              <a:lnSpc>
+                <a:spcPts val="1950"/>
+              </a:lnSpc>
+              <a:spcAft>
+                <a:spcPts val="0"/>
+              </a:spcAft>
+              <a:buNone/>
+            </a:pPr>
+            <a:r>
+              <a:rPr lang="en-US" sz="1500" b="0">
+                <a:solidFill>
+                  <a:srgbClr val="202B33"/>
+                </a:solidFill>
+                <a:latin typeface="Arial"/>
+                <a:ea typeface="Arial"/>
+                <a:cs typeface="Arial"/>
+              </a:rPr>
               <a:t xml:space="preserve">and lockdown. Hand the prompt out like a</a:t>
             </a:r>
             <a:endParaRPr lang="en-US" sz="1500"/>
@@ -8836,167 +8491,6 @@
                 <a:cs typeface="Arial"/>
               </a:rPr>
               <a:t xml:space="preserve">Meet a criterion the model can't know.</a:t>
-            </a:r>
-            <a:endParaRPr lang="en-US" sz="1500"/>
-          </a:p>
-          <a:p>
-            <a:pPr marL="0" indent="0">
-              <a:lnSpc>
-                <a:spcPts val="1950"/>
-              </a:lnSpc>
-              <a:spcAft>
-                <a:spcPts val="0"/>
-              </a:spcAft>
-              <a:buNone/>
-            </a:pPr>
-            <a:r>
-              <a:rPr lang="en-US" sz="1500" b="0">
-                <a:solidFill>
-                  <a:srgbClr val="202B33"/>
-                </a:solidFill>
-                <a:latin typeface="Arial"/>
-                <a:ea typeface="Arial"/>
-                <a:cs typeface="Arial"/>
-              </a:rPr>
-              <a:t xml:space="preserve"/>
-            </a:r>
-            <a:endParaRPr lang="en-US" sz="1500"/>
-          </a:p>
-          <a:p>
-            <a:pPr marL="0" indent="0">
-              <a:lnSpc>
-                <a:spcPts val="1950"/>
-              </a:lnSpc>
-              <a:spcAft>
-                <a:spcPts val="0"/>
-              </a:spcAft>
-              <a:buNone/>
-            </a:pPr>
-            <a:r>
-              <a:rPr lang="en-US" sz="1500" b="0">
-                <a:solidFill>
-                  <a:srgbClr val="202B33"/>
-                </a:solidFill>
-                <a:latin typeface="Arial"/>
-                <a:ea typeface="Arial"/>
-                <a:cs typeface="Arial"/>
-              </a:rPr>
-              <a:t xml:space="preserve">Privacy rides along for free. If you share</a:t>
-            </a:r>
-            <a:endParaRPr lang="en-US" sz="1500"/>
-          </a:p>
-          <a:p>
-            <a:pPr marL="0" indent="0">
-              <a:lnSpc>
-                <a:spcPts val="1950"/>
-              </a:lnSpc>
-              <a:spcAft>
-                <a:spcPts val="0"/>
-              </a:spcAft>
-              <a:buNone/>
-            </a:pPr>
-            <a:r>
-              <a:rPr lang="en-US" sz="1500" b="0">
-                <a:solidFill>
-                  <a:srgbClr val="202B33"/>
-                </a:solidFill>
-                <a:latin typeface="Arial"/>
-                <a:ea typeface="Arial"/>
-                <a:cs typeface="Arial"/>
-              </a:rPr>
-              <a:t xml:space="preserve">Lake Tahoe, maybe not the photo of your</a:t>
-            </a:r>
-            <a:endParaRPr lang="en-US" sz="1500"/>
-          </a:p>
-          <a:p>
-            <a:pPr marL="0" indent="0">
-              <a:lnSpc>
-                <a:spcPts val="1950"/>
-              </a:lnSpc>
-              <a:spcAft>
-                <a:spcPts val="0"/>
-              </a:spcAft>
-              <a:buNone/>
-            </a:pPr>
-            <a:r>
-              <a:rPr lang="en-US" sz="1500" b="0">
-                <a:solidFill>
-                  <a:srgbClr val="202B33"/>
-                </a:solidFill>
-                <a:latin typeface="Arial"/>
-                <a:ea typeface="Arial"/>
-                <a:cs typeface="Arial"/>
-              </a:rPr>
-              <a:t xml:space="preserve">grandparents' place on the water that any</a:t>
-            </a:r>
-            <a:endParaRPr lang="en-US" sz="1500"/>
-          </a:p>
-          <a:p>
-            <a:pPr marL="0" indent="0">
-              <a:lnSpc>
-                <a:spcPts val="1950"/>
-              </a:lnSpc>
-              <a:spcAft>
-                <a:spcPts val="0"/>
-              </a:spcAft>
-              <a:buNone/>
-            </a:pPr>
-            <a:r>
-              <a:rPr lang="en-US" sz="1500" b="0">
-                <a:solidFill>
-                  <a:srgbClr val="202B33"/>
-                </a:solidFill>
-                <a:latin typeface="Arial"/>
-                <a:ea typeface="Arial"/>
-                <a:cs typeface="Arial"/>
-              </a:rPr>
-              <a:t xml:space="preserve">model can geolocate. Nobody is teaching</a:t>
-            </a:r>
-            <a:endParaRPr lang="en-US" sz="1500"/>
-          </a:p>
-          <a:p>
-            <a:pPr marL="0" indent="0">
-              <a:lnSpc>
-                <a:spcPts val="1950"/>
-              </a:lnSpc>
-              <a:spcAft>
-                <a:spcPts val="0"/>
-              </a:spcAft>
-              <a:buNone/>
-            </a:pPr>
-            <a:r>
-              <a:rPr lang="en-US" sz="1500" b="0">
-                <a:solidFill>
-                  <a:srgbClr val="202B33"/>
-                </a:solidFill>
-                <a:latin typeface="Arial"/>
-                <a:ea typeface="Arial"/>
-                <a:cs typeface="Arial"/>
-              </a:rPr>
-              <a:t xml:space="preserve">students how these systems actually work.</a:t>
-            </a:r>
-            <a:endParaRPr lang="en-US" sz="1500"/>
-          </a:p>
-          <a:p>
-            <a:pPr marL="0" indent="0">
-              <a:lnSpc>
-                <a:spcPts val="1950"/>
-              </a:lnSpc>
-              <a:spcAft>
-                <a:spcPts val="0"/>
-              </a:spcAft>
-              <a:buNone/>
-            </a:pPr>
-            <a:r>
-              <a:rPr lang="en-US" sz="1500" b="0">
-                <a:solidFill>
-                  <a:srgbClr val="202B33"/>
-                </a:solidFill>
-                <a:latin typeface="Arial"/>
-                <a:ea typeface="Arial"/>
-                <a:cs typeface="Arial"/>
-              </a:rPr>
-              <a:t xml:space="preserve">This assignment does.</a:t>
             </a:r>
             <a:endParaRPr lang="en-US" sz="1500"/>
           </a:p>
@@ -11289,98 +10783,6 @@
             </a:r>
             <a:endParaRPr lang="en-US" sz="1500"/>
           </a:p>
-          <a:p>
-            <a:pPr marL="0" indent="0">
-              <a:lnSpc>
-                <a:spcPts val="1950"/>
-              </a:lnSpc>
-              <a:spcAft>
-                <a:spcPts val="0"/>
-              </a:spcAft>
-              <a:buNone/>
-            </a:pPr>
-            <a:r>
-              <a:rPr lang="en-US" sz="1500" b="0">
-                <a:solidFill>
-                  <a:srgbClr val="202B33"/>
-                </a:solidFill>
-                <a:latin typeface="Arial"/>
-                <a:ea typeface="Arial"/>
-                <a:cs typeface="Arial"/>
-              </a:rPr>
-              <a:t xml:space="preserve"/>
-            </a:r>
-            <a:endParaRPr lang="en-US" sz="1500"/>
-          </a:p>
-          <a:p>
-            <a:pPr marL="0" indent="0">
-              <a:lnSpc>
-                <a:spcPts val="1950"/>
-              </a:lnSpc>
-              <a:spcAft>
-                <a:spcPts val="0"/>
-              </a:spcAft>
-              <a:buNone/>
-            </a:pPr>
-            <a:r>
-              <a:rPr lang="en-US" sz="1500" b="0">
-                <a:solidFill>
-                  <a:srgbClr val="202B33"/>
-                </a:solidFill>
-                <a:latin typeface="Arial"/>
-                <a:ea typeface="Arial"/>
-                <a:cs typeface="Arial"/>
-              </a:rPr>
-              <a:t xml:space="preserve">Small groups, speaking, in class: that</a:t>
-            </a:r>
-            <a:endParaRPr lang="en-US" sz="1500"/>
-          </a:p>
-          <a:p>
-            <a:pPr marL="0" indent="0">
-              <a:lnSpc>
-                <a:spcPts val="1950"/>
-              </a:lnSpc>
-              <a:spcAft>
-                <a:spcPts val="0"/>
-              </a:spcAft>
-              <a:buNone/>
-            </a:pPr>
-            <a:r>
-              <a:rPr lang="en-US" sz="1500" b="0">
-                <a:solidFill>
-                  <a:srgbClr val="202B33"/>
-                </a:solidFill>
-                <a:latin typeface="Arial"/>
-                <a:ea typeface="Arial"/>
-                <a:cs typeface="Arial"/>
-              </a:rPr>
-              <a:t xml:space="preserve">resets the table. It adds social pressure</a:t>
-            </a:r>
-            <a:endParaRPr lang="en-US" sz="1500"/>
-          </a:p>
-          <a:p>
-            <a:pPr marL="0" indent="0">
-              <a:lnSpc>
-                <a:spcPts val="1950"/>
-              </a:lnSpc>
-              <a:spcAft>
-                <a:spcPts val="0"/>
-              </a:spcAft>
-              <a:buNone/>
-            </a:pPr>
-            <a:r>
-              <a:rPr lang="en-US" sz="1500" b="0">
-                <a:solidFill>
-                  <a:srgbClr val="202B33"/>
-                </a:solidFill>
-                <a:latin typeface="Arial"/>
-                <a:ea typeface="Arial"/>
-                <a:cs typeface="Arial"/>
-              </a:rPr>
-              <a:t xml:space="preserve">against cheating and hands you knobs on an</a:t>
-            </a:r>
-            <a:endParaRPr lang="en-US" sz="1500"/>
-          </a:p>
         </p:txBody>
       </p:sp>
       <p:sp>
@@ -11407,121 +10809,6 @@
             <a:noAutofit/>
           </a:bodyPr>
           <a:lstStyle/>
-          <a:p>
-            <a:pPr marL="0" indent="0">
-              <a:lnSpc>
-                <a:spcPts val="1950"/>
-              </a:lnSpc>
-              <a:spcAft>
-                <a:spcPts val="0"/>
-              </a:spcAft>
-              <a:buNone/>
-            </a:pPr>
-            <a:r>
-              <a:rPr lang="en-US" sz="1500" b="0">
-                <a:solidFill>
-                  <a:srgbClr val="202B33"/>
-                </a:solidFill>
-                <a:latin typeface="Arial"/>
-                <a:ea typeface="Arial"/>
-                <a:cs typeface="Arial"/>
-              </a:rPr>
-              <a:t xml:space="preserve">incentive structure that today is a magical</a:t>
-            </a:r>
-            <a:endParaRPr lang="en-US" sz="1500"/>
-          </a:p>
-          <a:p>
-            <a:pPr marL="0" indent="0">
-              <a:lnSpc>
-                <a:spcPts val="1950"/>
-              </a:lnSpc>
-              <a:spcAft>
-                <a:spcPts val="0"/>
-              </a:spcAft>
-              <a:buNone/>
-            </a:pPr>
-            <a:r>
-              <a:rPr lang="en-US" sz="1500" b="0">
-                <a:solidFill>
-                  <a:srgbClr val="202B33"/>
-                </a:solidFill>
-                <a:latin typeface="Arial"/>
-                <a:ea typeface="Arial"/>
-                <a:cs typeface="Arial"/>
-              </a:rPr>
-              <a:t xml:space="preserve">cheating genie. Not foolproof. A student</a:t>
-            </a:r>
-            <a:endParaRPr lang="en-US" sz="1500"/>
-          </a:p>
-          <a:p>
-            <a:pPr marL="0" indent="0">
-              <a:lnSpc>
-                <a:spcPts val="1950"/>
-              </a:lnSpc>
-              <a:spcAft>
-                <a:spcPts val="0"/>
-              </a:spcAft>
-              <a:buNone/>
-            </a:pPr>
-            <a:r>
-              <a:rPr lang="en-US" sz="1500" b="0">
-                <a:solidFill>
-                  <a:srgbClr val="202B33"/>
-                </a:solidFill>
-                <a:latin typeface="Arial"/>
-                <a:ea typeface="Arial"/>
-                <a:cs typeface="Arial"/>
-              </a:rPr>
-              <a:t xml:space="preserve">can build an agent told to seem dumb at</a:t>
-            </a:r>
-            <a:endParaRPr lang="en-US" sz="1500"/>
-          </a:p>
-          <a:p>
-            <a:pPr marL="0" indent="0">
-              <a:lnSpc>
-                <a:spcPts val="1950"/>
-              </a:lnSpc>
-              <a:spcAft>
-                <a:spcPts val="0"/>
-              </a:spcAft>
-              <a:buNone/>
-            </a:pPr>
-            <a:r>
-              <a:rPr lang="en-US" sz="1500" b="0">
-                <a:solidFill>
-                  <a:srgbClr val="202B33"/>
-                </a:solidFill>
-                <a:latin typeface="Arial"/>
-                <a:ea typeface="Arial"/>
-                <a:cs typeface="Arial"/>
-              </a:rPr>
-              <a:t xml:space="preserve">first and then learn. Fine. We're changing</a:t>
-            </a:r>
-            <a:endParaRPr lang="en-US" sz="1500"/>
-          </a:p>
-          <a:p>
-            <a:pPr marL="0" indent="0">
-              <a:lnSpc>
-                <a:spcPts val="1950"/>
-              </a:lnSpc>
-              <a:spcAft>
-                <a:spcPts val="0"/>
-              </a:spcAft>
-              <a:buNone/>
-            </a:pPr>
-            <a:r>
-              <a:rPr lang="en-US" sz="1500" b="0">
-                <a:solidFill>
-                  <a:srgbClr val="202B33"/>
-                </a:solidFill>
-                <a:latin typeface="Arial"/>
-                <a:ea typeface="Arial"/>
-                <a:cs typeface="Arial"/>
-              </a:rPr>
-              <a:t xml:space="preserve">incentives, not buying certainty.</a:t>
-            </a:r>
-            <a:endParaRPr lang="en-US" sz="1500"/>
-          </a:p>
           <a:p>
             <a:pPr marL="0" indent="0">
               <a:lnSpc>
